--- a/docs/cosim_issue_report.pptx
+++ b/docs/cosim_issue_report.pptx
@@ -16,6 +16,9 @@
     <p:sldId id="264" r:id="rId15"/>
     <p:sldId id="265" r:id="rId16"/>
     <p:sldId id="266" r:id="rId17"/>
+    <p:sldId id="267" r:id="rId18"/>
+    <p:sldId id="268" r:id="rId19"/>
+    <p:sldId id="269" r:id="rId20"/>
   </p:sldIdLst>
   <p:sldSz cx="9144000" cy="6858000" type="screen4x3"/>
   <p:notesSz cx="6858000" cy="9144000"/>
@@ -3211,7 +3214,7 @@
               </a:defRPr>
             </a:pPr>
             <a:r>
-              <a:t>修复提交记录</a:t>
+              <a:t>问题 11: DMA write 顺序导致 aux channel 僵死 [关键突破]</a:t>
             </a:r>
           </a:p>
         </p:txBody>
@@ -3250,206 +3253,129 @@
               </a:defRPr>
             </a:pPr>
             <a:r>
-              <a:t>Commit 1: feat(setup): cosim.sh start qemu/vcs 支持 TCP transport</a:t>
-            </a:r>
-          </a:p>
-          <a:p>
-            <a:pPr>
-              <a:spcBef>
-                <a:spcPts val="600"/>
-              </a:spcBef>
-              <a:defRPr sz="1500">
-                <a:solidFill>
-                  <a:srgbClr val="333333"/>
-                </a:solidFill>
-                <a:latin typeface="SimHei"/>
-              </a:defRPr>
-            </a:pPr>
-            <a:r>
-              <a:t>  cmd_start_qemu: --transport, --port-base, --instance-id, --drive, --append</a:t>
-            </a:r>
-          </a:p>
-          <a:p>
-            <a:pPr>
-              <a:spcBef>
-                <a:spcPts val="600"/>
-              </a:spcBef>
-              <a:defRPr sz="1500">
-                <a:solidFill>
-                  <a:srgbClr val="333333"/>
-                </a:solidFill>
-                <a:latin typeface="SimHei"/>
-              </a:defRPr>
-            </a:pPr>
-            <a:r>
-              <a:t>  cmd_start_vcs: --transport, --remote-host, --port-base, --instance-id</a:t>
-            </a:r>
-          </a:p>
-          <a:p>
-            <a:pPr>
-              <a:spcBef>
-                <a:spcPts val="600"/>
-              </a:spcBef>
-              <a:defRPr sz="1500">
-                <a:solidFill>
-                  <a:srgbClr val="333333"/>
-                </a:solidFill>
-                <a:latin typeface="SimHei"/>
-              </a:defRPr>
-            </a:pPr>
-            <a:r>
-              <a:t>  setup.sh: TAP_BRIDGE 归属翻转, VCS 源文件修正, setcap 提示</a:t>
-            </a:r>
-          </a:p>
-          <a:p>
-            <a:pPr>
-              <a:spcBef>
-                <a:spcPts val="600"/>
-              </a:spcBef>
-              <a:defRPr sz="1500">
-                <a:solidFill>
-                  <a:srgbClr val="333333"/>
-                </a:solidFill>
-                <a:latin typeface="SimHei"/>
-              </a:defRPr>
-            </a:pPr>
-          </a:p>
-          <a:p>
-            <a:pPr>
-              <a:spcBef>
-                <a:spcPts val="600"/>
-              </a:spcBef>
-              <a:defRPr sz="1500">
-                <a:solidFill>
-                  <a:srgbClr val="333333"/>
-                </a:solidFill>
-                <a:latin typeface="SimHei"/>
-              </a:defRPr>
-            </a:pPr>
-            <a:r>
-              <a:t>Commit 2: fix(vcs): setup.sh 改用 make vcs-vip + VIP 模式补 MSI</a:t>
-            </a:r>
-          </a:p>
-          <a:p>
-            <a:pPr>
-              <a:spcBef>
-                <a:spcPts val="600"/>
-              </a:spcBef>
-              <a:defRPr sz="1500">
-                <a:solidFill>
-                  <a:srgbClr val="333333"/>
-                </a:solidFill>
-                <a:latin typeface="SimHei"/>
-              </a:defRPr>
-            </a:pPr>
-            <a:r>
-              <a:t>  setup.sh VCS 编译从内联 vcs 改为 make vcs-vip</a:t>
-            </a:r>
-          </a:p>
-          <a:p>
-            <a:pPr>
-              <a:spcBef>
-                <a:spcPts val="600"/>
-              </a:spcBef>
-              <a:defRPr sz="1500">
-                <a:solidFill>
-                  <a:srgbClr val="333333"/>
-                </a:solidFill>
-                <a:latin typeface="SimHei"/>
-              </a:defRPr>
-            </a:pPr>
-            <a:r>
-              <a:t>  cosim_vip_top.sv RX inject 后补 ISR + raise_msi</a:t>
-            </a:r>
-          </a:p>
-          <a:p>
-            <a:pPr>
-              <a:spcBef>
-                <a:spcPts val="600"/>
-              </a:spcBef>
-              <a:defRPr sz="1500">
-                <a:solidFill>
-                  <a:srgbClr val="333333"/>
-                </a:solidFill>
-                <a:latin typeface="SimHei"/>
-              </a:defRPr>
-            </a:pPr>
-            <a:r>
-              <a:t>  resolve_simv 优先搜 build/simv_vip</a:t>
-            </a:r>
-          </a:p>
-          <a:p>
-            <a:pPr>
-              <a:spcBef>
-                <a:spcPts val="600"/>
-              </a:spcBef>
-              <a:defRPr sz="1500">
-                <a:solidFill>
-                  <a:srgbClr val="333333"/>
-                </a:solidFill>
-                <a:latin typeface="SimHei"/>
-              </a:defRPr>
-            </a:pPr>
-          </a:p>
-          <a:p>
-            <a:pPr>
-              <a:spcBef>
-                <a:spcPts val="600"/>
-              </a:spcBef>
-              <a:defRPr sz="1500">
-                <a:solidFill>
-                  <a:srgbClr val="333333"/>
-                </a:solidFill>
-                <a:latin typeface="SimHei"/>
-              </a:defRPr>
-            </a:pPr>
-            <a:r>
-              <a:t>Commit 3: fix(glue): stub_isr_set 改为 input</a:t>
-            </a:r>
-          </a:p>
-          <a:p>
-            <a:pPr>
-              <a:spcBef>
-                <a:spcPts val="600"/>
-              </a:spcBef>
-              <a:defRPr sz="1500">
-                <a:solidFill>
-                  <a:srgbClr val="333333"/>
-                </a:solidFill>
-                <a:latin typeface="SimHei"/>
-              </a:defRPr>
-            </a:pPr>
-            <a:r>
-              <a:t>  消除 assign 0 与过程化驱动的多驱动冲突</a:t>
-            </a:r>
-          </a:p>
-          <a:p>
-            <a:pPr>
-              <a:spcBef>
-                <a:spcPts val="600"/>
-              </a:spcBef>
-              <a:defRPr sz="1500">
-                <a:solidFill>
-                  <a:srgbClr val="333333"/>
-                </a:solidFill>
-                <a:latin typeface="SimHei"/>
-              </a:defRPr>
-            </a:pPr>
-          </a:p>
-          <a:p>
-            <a:pPr>
-              <a:spcBef>
-                <a:spcPts val="600"/>
-              </a:spcBef>
-              <a:defRPr sz="1500">
-                <a:solidFill>
-                  <a:srgbClr val="333333"/>
-                </a:solidFill>
-                <a:latin typeface="SimHei"/>
-              </a:defRPr>
-            </a:pPr>
-            <a:r>
-              <a:t>待修复: TCP transport DMA read 消息交错</a:t>
+              <a:t>现象: dma_write_bytes 先发 DMA_DATA 再发 DMA_REQ</a:t>
+            </a:r>
+          </a:p>
+          <a:p>
+            <a:pPr>
+              <a:spcBef>
+                <a:spcPts val="600"/>
+              </a:spcBef>
+              <a:defRPr sz="1500">
+                <a:solidFill>
+                  <a:srgbClr val="333333"/>
+                </a:solidFill>
+                <a:latin typeface="SimHei"/>
+              </a:defRPr>
+            </a:pPr>
+            <a:r>
+              <a:t>  irq_poller MSG_PEEK 看到 DMA_DATA（非 DMA_REQ）→ 不匹配 → 返回 1</a:t>
+            </a:r>
+          </a:p>
+          <a:p>
+            <a:pPr>
+              <a:spcBef>
+                <a:spcPts val="600"/>
+              </a:spcBef>
+              <a:defRPr sz="1500">
+                <a:solidFill>
+                  <a:srgbClr val="333333"/>
+                </a:solidFill>
+                <a:latin typeface="SimHei"/>
+              </a:defRPr>
+            </a:pPr>
+            <a:r>
+              <a:t>  DMA_REQ 在 DMA_DATA 后面永远读不到</a:t>
+            </a:r>
+          </a:p>
+          <a:p>
+            <a:pPr>
+              <a:spcBef>
+                <a:spcPts val="600"/>
+              </a:spcBef>
+              <a:defRPr sz="1500">
+                <a:solidFill>
+                  <a:srgbClr val="333333"/>
+                </a:solidFill>
+                <a:latin typeface="SimHei"/>
+              </a:defRPr>
+            </a:pPr>
+            <a:r>
+              <a:t>  → aux channel 僵死 → ctrl recv_sync 断开 → 所有后续 DMA 失败</a:t>
+            </a:r>
+          </a:p>
+          <a:p>
+            <a:pPr>
+              <a:spcBef>
+                <a:spcPts val="600"/>
+              </a:spcBef>
+              <a:defRPr sz="1500">
+                <a:solidFill>
+                  <a:srgbClr val="333333"/>
+                </a:solidFill>
+                <a:latin typeface="SimHei"/>
+              </a:defRPr>
+            </a:pPr>
+          </a:p>
+          <a:p>
+            <a:pPr>
+              <a:spcBef>
+                <a:spcPts val="600"/>
+              </a:spcBef>
+              <a:defRPr sz="1500">
+                <a:solidFill>
+                  <a:srgbClr val="333333"/>
+                </a:solidFill>
+                <a:latin typeface="SimHei"/>
+              </a:defRPr>
+            </a:pPr>
+            <a:r>
+              <a:t>修复: 调换顺序 — 先 send_dma_req 再 send_dma_data</a:t>
+            </a:r>
+          </a:p>
+          <a:p>
+            <a:pPr>
+              <a:spcBef>
+                <a:spcPts val="600"/>
+              </a:spcBef>
+              <a:defRPr sz="1500">
+                <a:solidFill>
+                  <a:srgbClr val="333333"/>
+                </a:solidFill>
+                <a:latin typeface="SimHei"/>
+              </a:defRPr>
+            </a:pPr>
+            <a:r>
+              <a:t>  irq_poller PEEK 到 DMA_REQ → 匹配 → cosim_dma_cb → recv_dma_data</a:t>
+            </a:r>
+          </a:p>
+          <a:p>
+            <a:pPr>
+              <a:spcBef>
+                <a:spcPts val="600"/>
+              </a:spcBef>
+              <a:defRPr sz="1500">
+                <a:solidFill>
+                  <a:srgbClr val="333333"/>
+                </a:solidFill>
+                <a:latin typeface="SimHei"/>
+              </a:defRPr>
+            </a:pPr>
+          </a:p>
+          <a:p>
+            <a:pPr>
+              <a:spcBef>
+                <a:spcPts val="600"/>
+              </a:spcBef>
+              <a:defRPr sz="1500">
+                <a:solidFill>
+                  <a:srgbClr val="333333"/>
+                </a:solidFill>
+                <a:latin typeface="SimHei"/>
+              </a:defRPr>
+            </a:pPr>
+            <a:r>
+              <a:t>效果: DMA read/write 全部正常, MSI 中断注入成功, 数据面打通</a:t>
             </a:r>
           </a:p>
         </p:txBody>
@@ -3503,7 +3429,7 @@
               </a:defRPr>
             </a:pPr>
             <a:r>
-              <a:t>下一步计划</a:t>
+              <a:t>TCP Transport Channel 架构分析</a:t>
             </a:r>
           </a:p>
         </p:txBody>
@@ -3542,190 +3468,1677 @@
               </a:defRPr>
             </a:pPr>
             <a:r>
-              <a:t>1. 修复 TCP transport 消息交错问题</a:t>
-            </a:r>
-          </a:p>
-          <a:p>
-            <a:pPr>
-              <a:spcBef>
-                <a:spcPts val="600"/>
-              </a:spcBef>
-              <a:defRPr sz="1500">
-                <a:solidFill>
-                  <a:srgbClr val="333333"/>
-                </a:solidFill>
-                <a:latin typeface="SimHei"/>
-              </a:defRPr>
-            </a:pPr>
-            <a:r>
-              <a:t>  bridge_dma_read_bytes 消费 TLP_READY 时同步缓存 TLP 数据</a:t>
-            </a:r>
-          </a:p>
-          <a:p>
-            <a:pPr>
-              <a:spcBef>
-                <a:spcPts val="600"/>
-              </a:spcBef>
-              <a:defRPr sz="1500">
-                <a:solidFill>
-                  <a:srgbClr val="333333"/>
-                </a:solidFill>
-                <a:latin typeface="SimHei"/>
-              </a:defRPr>
-            </a:pPr>
-            <a:r>
-              <a:t>  避免 pending_tlp 计数与 data channel 消息错位</a:t>
-            </a:r>
-          </a:p>
-          <a:p>
-            <a:pPr>
-              <a:spcBef>
-                <a:spcPts val="600"/>
-              </a:spcBef>
-              <a:defRPr sz="1500">
-                <a:solidFill>
-                  <a:srgbClr val="333333"/>
-                </a:solidFill>
-                <a:latin typeface="SimHei"/>
-              </a:defRPr>
-            </a:pPr>
-          </a:p>
-          <a:p>
-            <a:pPr>
-              <a:spcBef>
-                <a:spcPts val="600"/>
-              </a:spcBef>
-              <a:defRPr sz="1500">
-                <a:solidFill>
-                  <a:srgbClr val="333333"/>
-                </a:solidFill>
-                <a:latin typeface="SimHei"/>
-              </a:defRPr>
-            </a:pPr>
-            <a:r>
-              <a:t>2. 重新编译 VCS simv_vip（含 MSI + glue 修复）</a:t>
-            </a:r>
-          </a:p>
-          <a:p>
-            <a:pPr>
-              <a:spcBef>
-                <a:spcPts val="600"/>
-              </a:spcBef>
-              <a:defRPr sz="1500">
-                <a:solidFill>
-                  <a:srgbClr val="333333"/>
-                </a:solidFill>
-                <a:latin typeface="SimHei"/>
-              </a:defRPr>
-            </a:pPr>
-          </a:p>
-          <a:p>
-            <a:pPr>
-              <a:spcBef>
-                <a:spcPts val="600"/>
-              </a:spcBef>
-              <a:defRPr sz="1500">
-                <a:solidFill>
-                  <a:srgbClr val="333333"/>
-                </a:solidFill>
-                <a:latin typeface="SimHei"/>
-              </a:defRPr>
-            </a:pPr>
-            <a:r>
-              <a:t>3. 跨机端到端验证</a:t>
-            </a:r>
-          </a:p>
-          <a:p>
-            <a:pPr>
-              <a:spcBef>
-                <a:spcPts val="600"/>
-              </a:spcBef>
-              <a:defRPr sz="1500">
-                <a:solidFill>
-                  <a:srgbClr val="333333"/>
-                </a:solidFill>
-                <a:latin typeface="SimHei"/>
-              </a:defRPr>
-            </a:pPr>
-            <a:r>
-              <a:t>  目标: Guest ping 10.0.0.1 成功</a:t>
-            </a:r>
-          </a:p>
-          <a:p>
-            <a:pPr>
-              <a:spcBef>
-                <a:spcPts val="600"/>
-              </a:spcBef>
-              <a:defRPr sz="1500">
-                <a:solidFill>
-                  <a:srgbClr val="333333"/>
-                </a:solidFill>
-                <a:latin typeface="SimHei"/>
-              </a:defRPr>
-            </a:pPr>
-            <a:r>
-              <a:t>  目标: iperf 吞吐测试通过</a:t>
-            </a:r>
-          </a:p>
-          <a:p>
-            <a:pPr>
-              <a:spcBef>
-                <a:spcPts val="600"/>
-              </a:spcBef>
-              <a:defRPr sz="1500">
-                <a:solidFill>
-                  <a:srgbClr val="333333"/>
-                </a:solidFill>
-                <a:latin typeface="SimHei"/>
-              </a:defRPr>
-            </a:pPr>
-          </a:p>
-          <a:p>
-            <a:pPr>
-              <a:spcBef>
-                <a:spcPts val="600"/>
-              </a:spcBef>
-              <a:defRPr sz="1500">
-                <a:solidFill>
-                  <a:srgbClr val="333333"/>
-                </a:solidFill>
-                <a:latin typeface="SimHei"/>
-              </a:defRPr>
-            </a:pPr>
-            <a:r>
-              <a:t>4. 更新文档</a:t>
-            </a:r>
-          </a:p>
-          <a:p>
-            <a:pPr>
-              <a:spcBef>
-                <a:spcPts val="600"/>
-              </a:spcBef>
-              <a:defRPr sz="1500">
-                <a:solidFill>
-                  <a:srgbClr val="333333"/>
-                </a:solidFill>
-                <a:latin typeface="SimHei"/>
-              </a:defRPr>
-            </a:pPr>
-            <a:r>
-              <a:t>  补充 kernel/rootfs 外部依赖说明</a:t>
-            </a:r>
-          </a:p>
-          <a:p>
-            <a:pPr>
-              <a:spcBef>
-                <a:spcPts val="600"/>
-              </a:spcBef>
-              <a:defRPr sz="1500">
-                <a:solidFill>
-                  <a:srgbClr val="333333"/>
-                </a:solidFill>
-                <a:latin typeface="SimHei"/>
-              </a:defRPr>
-            </a:pPr>
-            <a:r>
-              <a:t>  补充 EDA 环境前置要求</a:t>
+              <a:t>当前 v2 三连接架构:</a:t>
+            </a:r>
+          </a:p>
+          <a:p>
+            <a:pPr>
+              <a:spcBef>
+                <a:spcPts val="600"/>
+              </a:spcBef>
+              <a:defRPr sz="1500">
+                <a:solidFill>
+                  <a:srgbClr val="333333"/>
+                </a:solidFill>
+                <a:latin typeface="SimHei"/>
+              </a:defRPr>
+            </a:pPr>
+            <a:r>
+              <a:t>  ctrl (port_base+0): sync_msg — TLP_READY, CPL_READY, DMA_CPL, SHUTDOWN</a:t>
+            </a:r>
+          </a:p>
+          <a:p>
+            <a:pPr>
+              <a:spcBef>
+                <a:spcPts val="600"/>
+              </a:spcBef>
+              <a:defRPr sz="1500">
+                <a:solidFill>
+                  <a:srgbClr val="333333"/>
+                </a:solidFill>
+                <a:latin typeface="SimHei"/>
+              </a:defRPr>
+            </a:pPr>
+            <a:r>
+              <a:t>  data (port_base+1): TLP, CPL 数据</a:t>
+            </a:r>
+          </a:p>
+          <a:p>
+            <a:pPr>
+              <a:spcBef>
+                <a:spcPts val="600"/>
+              </a:spcBef>
+              <a:defRPr sz="1500">
+                <a:solidFill>
+                  <a:srgbClr val="333333"/>
+                </a:solidFill>
+                <a:latin typeface="SimHei"/>
+              </a:defRPr>
+            </a:pPr>
+            <a:r>
+              <a:t>  aux  (port_base+2): DMA_REQ, DMA_CPL, MSI, ETH, DMA_DATA</a:t>
+            </a:r>
+          </a:p>
+          <a:p>
+            <a:pPr>
+              <a:spcBef>
+                <a:spcPts val="600"/>
+              </a:spcBef>
+              <a:defRPr sz="1500">
+                <a:solidFill>
+                  <a:srgbClr val="333333"/>
+                </a:solidFill>
+                <a:latin typeface="SimHei"/>
+              </a:defRPr>
+            </a:pPr>
+          </a:p>
+          <a:p>
+            <a:pPr>
+              <a:spcBef>
+                <a:spcPts val="600"/>
+              </a:spcBef>
+              <a:defRPr sz="1500">
+                <a:solidFill>
+                  <a:srgbClr val="333333"/>
+                </a:solidFill>
+                <a:latin typeface="SimHei"/>
+              </a:defRPr>
+            </a:pPr>
+            <a:r>
+              <a:t>问题: ctrl channel 是共享的</a:t>
+            </a:r>
+          </a:p>
+          <a:p>
+            <a:pPr>
+              <a:spcBef>
+                <a:spcPts val="600"/>
+              </a:spcBef>
+              <a:defRPr sz="1500">
+                <a:solidFill>
+                  <a:srgbClr val="333333"/>
+                </a:solidFill>
+                <a:latin typeface="SimHei"/>
+              </a:defRPr>
+            </a:pPr>
+            <a:r>
+              <a:t>  TLP_READY 和 DMA_CPL 都走 ctrl channel</a:t>
+            </a:r>
+          </a:p>
+          <a:p>
+            <a:pPr>
+              <a:spcBef>
+                <a:spcPts val="600"/>
+              </a:spcBef>
+              <a:defRPr sz="1500">
+                <a:solidFill>
+                  <a:srgbClr val="333333"/>
+                </a:solidFill>
+                <a:latin typeface="SimHei"/>
+              </a:defRPr>
+            </a:pPr>
+            <a:r>
+              <a:t>  DMA read 循环 recv_sync 消费本属于 poll 的 TLP_READY</a:t>
+            </a:r>
+          </a:p>
+          <a:p>
+            <a:pPr>
+              <a:spcBef>
+                <a:spcPts val="600"/>
+              </a:spcBef>
+              <a:defRPr sz="1500">
+                <a:solidFill>
+                  <a:srgbClr val="333333"/>
+                </a:solidFill>
+                <a:latin typeface="SimHei"/>
+              </a:defRPr>
+            </a:pPr>
+            <a:r>
+              <a:t>  消费后只计数 (pending_tlp++), 不读 data channel 上的 TLP 数据</a:t>
+            </a:r>
+          </a:p>
+          <a:p>
+            <a:pPr>
+              <a:spcBef>
+                <a:spcPts val="600"/>
+              </a:spcBef>
+              <a:defRPr sz="1500">
+                <a:solidFill>
+                  <a:srgbClr val="333333"/>
+                </a:solidFill>
+                <a:latin typeface="SimHei"/>
+              </a:defRPr>
+            </a:pPr>
+            <a:r>
+              <a:t>  后续 recv_tlp 与 data channel 上的消息错位</a:t>
+            </a:r>
+          </a:p>
+          <a:p>
+            <a:pPr>
+              <a:spcBef>
+                <a:spcPts val="600"/>
+              </a:spcBef>
+              <a:defRPr sz="1500">
+                <a:solidFill>
+                  <a:srgbClr val="333333"/>
+                </a:solidFill>
+                <a:latin typeface="SimHei"/>
+              </a:defRPr>
+            </a:pPr>
+          </a:p>
+          <a:p>
+            <a:pPr>
+              <a:spcBef>
+                <a:spcPts val="600"/>
+              </a:spcBef>
+              <a:defRPr sz="1500">
+                <a:solidFill>
+                  <a:srgbClr val="333333"/>
+                </a:solidFill>
+                <a:latin typeface="SimHei"/>
+              </a:defRPr>
+            </a:pPr>
+            <a:r>
+              <a:t>解决方案 (选项):</a:t>
+            </a:r>
+          </a:p>
+          <a:p>
+            <a:pPr>
+              <a:spcBef>
+                <a:spcPts val="600"/>
+              </a:spcBef>
+              <a:defRPr sz="1500">
+                <a:solidFill>
+                  <a:srgbClr val="333333"/>
+                </a:solidFill>
+                <a:latin typeface="SimHei"/>
+              </a:defRPr>
+            </a:pPr>
+            <a:r>
+              <a:t>  A: DMA read 消费 TLP_READY 时同步 recv_tlp 缓存完整 TLP</a:t>
+            </a:r>
+          </a:p>
+          <a:p>
+            <a:pPr>
+              <a:spcBef>
+                <a:spcPts val="600"/>
+              </a:spcBef>
+              <a:defRPr sz="1500">
+                <a:solidFill>
+                  <a:srgbClr val="333333"/>
+                </a:solidFill>
+                <a:latin typeface="SimHei"/>
+              </a:defRPr>
+            </a:pPr>
+            <a:r>
+              <a:t>  B: 将 TLP_READY 和 DMA_CPL 拆分到不同 channel</a:t>
+            </a:r>
+          </a:p>
+          <a:p>
+            <a:pPr>
+              <a:spcBef>
+                <a:spcPts val="600"/>
+              </a:spcBef>
+              <a:defRPr sz="1500">
+                <a:solidFill>
+                  <a:srgbClr val="333333"/>
+                </a:solidFill>
+                <a:latin typeface="SimHei"/>
+              </a:defRPr>
+            </a:pPr>
+            <a:r>
+              <a:t>  C: 消息自描述 — data channel 每条消息带 type header</a:t>
+            </a:r>
+          </a:p>
+        </p:txBody>
+      </p:sp>
+    </p:spTree>
+  </p:cSld>
+  <p:clrMapOvr>
+    <a:masterClrMapping/>
+  </p:clrMapOvr>
+</p:sld>
+</file>
+
+<file path=ppt/slides/slide12.xml><?xml version="1.0" encoding="utf-8"?>
+<p:sld xmlns:a="http://schemas.openxmlformats.org/drawingml/2006/main" xmlns:p="http://schemas.openxmlformats.org/presentationml/2006/main" xmlns:r="http://schemas.openxmlformats.org/officeDocument/2006/relationships">
+  <p:cSld>
+    <p:spTree>
+      <p:nvGrpSpPr>
+        <p:cNvPr id="1" name=""/>
+        <p:cNvGrpSpPr/>
+        <p:nvPr/>
+      </p:nvGrpSpPr>
+      <p:grpSpPr/>
+      <p:sp>
+        <p:nvSpPr>
+          <p:cNvPr id="2" name="TextBox 1"/>
+          <p:cNvSpPr txBox="1"/>
+          <p:nvPr/>
+        </p:nvSpPr>
+        <p:spPr>
+          <a:xfrm>
+            <a:off x="0" y="0"/>
+            <a:ext cx="9144000" cy="822960"/>
+          </a:xfrm>
+          <a:prstGeom prst="rect">
+            <a:avLst/>
+          </a:prstGeom>
+          <a:noFill/>
+        </p:spPr>
+        <p:txBody>
+          <a:bodyPr wrap="none" lIns="457200" anchor="ctr">
+            <a:spAutoFit/>
+          </a:bodyPr>
+          <a:lstStyle/>
+          <a:p>
+            <a:pPr>
+              <a:defRPr sz="2400" b="1">
+                <a:solidFill>
+                  <a:srgbClr val="002B5C"/>
+                </a:solidFill>
+                <a:latin typeface="SimHei"/>
+              </a:defRPr>
+            </a:pPr>
+            <a:r>
+              <a:t>跨机测试验证结果 (53 ↔ 61)</a:t>
+            </a:r>
+          </a:p>
+        </p:txBody>
+      </p:sp>
+      <p:graphicFrame>
+        <p:nvGraphicFramePr>
+          <p:cNvPr id="3" name="Table 2"/>
+          <p:cNvGraphicFramePr>
+            <a:graphicFrameLocks noGrp="1"/>
+          </p:cNvGraphicFramePr>
+          <p:nvPr/>
+        </p:nvGraphicFramePr>
+        <p:xfrm>
+          <a:off x="365760" y="1097280"/>
+          <a:ext cx="8412480" cy="4754880"/>
+        </p:xfrm>
+        <a:graphic>
+          <a:graphicData uri="http://schemas.openxmlformats.org/drawingml/2006/table">
+            <a:tbl>
+              <a:tblPr firstRow="1" bandRow="1">
+                <a:tableStyleId>{5C22544A-7EE6-4342-B048-85BDC9FD1C3A}</a:tableStyleId>
+              </a:tblPr>
+              <a:tblGrid>
+                <a:gridCol w="2804160"/>
+                <a:gridCol w="2804160"/>
+                <a:gridCol w="2804160"/>
+              </a:tblGrid>
+              <a:tr h="365760">
+                <a:tc>
+                  <a:txBody>
+                    <a:bodyPr/>
+                    <a:lstStyle/>
+                    <a:p>
+                      <a:pPr algn="ctr">
+                        <a:defRPr sz="1300" b="1">
+                          <a:solidFill>
+                            <a:srgbClr val="FFFFFF"/>
+                          </a:solidFill>
+                          <a:latin typeface="SimHei"/>
+                        </a:defRPr>
+                      </a:pPr>
+                      <a:r>
+                        <a:t>测试项</a:t>
+                      </a:r>
+                    </a:p>
+                  </a:txBody>
+                  <a:tcPr>
+                    <a:solidFill>
+                      <a:srgbClr val="003D7A"/>
+                    </a:solidFill>
+                  </a:tcPr>
+                </a:tc>
+                <a:tc>
+                  <a:txBody>
+                    <a:bodyPr/>
+                    <a:lstStyle/>
+                    <a:p>
+                      <a:pPr algn="ctr">
+                        <a:defRPr sz="1300" b="1">
+                          <a:solidFill>
+                            <a:srgbClr val="FFFFFF"/>
+                          </a:solidFill>
+                          <a:latin typeface="SimHei"/>
+                        </a:defRPr>
+                      </a:pPr>
+                      <a:r>
+                        <a:t>结果</a:t>
+                      </a:r>
+                    </a:p>
+                  </a:txBody>
+                  <a:tcPr>
+                    <a:solidFill>
+                      <a:srgbClr val="003D7A"/>
+                    </a:solidFill>
+                  </a:tcPr>
+                </a:tc>
+                <a:tc>
+                  <a:txBody>
+                    <a:bodyPr/>
+                    <a:lstStyle/>
+                    <a:p>
+                      <a:pPr algn="ctr">
+                        <a:defRPr sz="1300" b="1">
+                          <a:solidFill>
+                            <a:srgbClr val="FFFFFF"/>
+                          </a:solidFill>
+                          <a:latin typeface="SimHei"/>
+                        </a:defRPr>
+                      </a:pPr>
+                      <a:r>
+                        <a:t>说明</a:t>
+                      </a:r>
+                    </a:p>
+                  </a:txBody>
+                  <a:tcPr>
+                    <a:solidFill>
+                      <a:srgbClr val="003D7A"/>
+                    </a:solidFill>
+                  </a:tcPr>
+                </a:tc>
+              </a:tr>
+              <a:tr h="365760">
+                <a:tc>
+                  <a:txBody>
+                    <a:bodyPr/>
+                    <a:lstStyle/>
+                    <a:p>
+                      <a:pPr algn="l">
+                        <a:defRPr sz="1200">
+                          <a:solidFill>
+                            <a:srgbClr val="000000"/>
+                          </a:solidFill>
+                          <a:latin typeface="SimHei"/>
+                        </a:defRPr>
+                      </a:pPr>
+                      <a:r>
+                        <a:t>QEMU TCP listen (53)</a:t>
+                      </a:r>
+                    </a:p>
+                  </a:txBody>
+                  <a:tcPr/>
+                </a:tc>
+                <a:tc>
+                  <a:txBody>
+                    <a:bodyPr/>
+                    <a:lstStyle/>
+                    <a:p>
+                      <a:pPr algn="l">
+                        <a:defRPr sz="1200">
+                          <a:solidFill>
+                            <a:srgbClr val="000000"/>
+                          </a:solidFill>
+                          <a:latin typeface="SimHei"/>
+                        </a:defRPr>
+                      </a:pPr>
+                      <a:r>
+                        <a:t>✅</a:t>
+                      </a:r>
+                    </a:p>
+                  </a:txBody>
+                  <a:tcPr/>
+                </a:tc>
+                <a:tc>
+                  <a:txBody>
+                    <a:bodyPr/>
+                    <a:lstStyle/>
+                    <a:p>
+                      <a:pPr algn="l">
+                        <a:defRPr sz="1200">
+                          <a:solidFill>
+                            <a:srgbClr val="000000"/>
+                          </a:solidFill>
+                          <a:latin typeface="SimHei"/>
+                        </a:defRPr>
+                      </a:pPr>
+                      <a:r>
+                        <a:t>端口 9100 v2 三连接握手</a:t>
+                      </a:r>
+                    </a:p>
+                  </a:txBody>
+                  <a:tcPr/>
+                </a:tc>
+              </a:tr>
+              <a:tr h="365760">
+                <a:tc>
+                  <a:txBody>
+                    <a:bodyPr/>
+                    <a:lstStyle/>
+                    <a:p>
+                      <a:pPr algn="l">
+                        <a:defRPr sz="1200">
+                          <a:solidFill>
+                            <a:srgbClr val="000000"/>
+                          </a:solidFill>
+                          <a:latin typeface="SimHei"/>
+                        </a:defRPr>
+                      </a:pPr>
+                      <a:r>
+                        <a:t>VCS TCP connect (61)</a:t>
+                      </a:r>
+                    </a:p>
+                  </a:txBody>
+                  <a:tcPr>
+                    <a:solidFill>
+                      <a:srgbClr val="E8F0FA"/>
+                    </a:solidFill>
+                  </a:tcPr>
+                </a:tc>
+                <a:tc>
+                  <a:txBody>
+                    <a:bodyPr/>
+                    <a:lstStyle/>
+                    <a:p>
+                      <a:pPr algn="l">
+                        <a:defRPr sz="1200">
+                          <a:solidFill>
+                            <a:srgbClr val="000000"/>
+                          </a:solidFill>
+                          <a:latin typeface="SimHei"/>
+                        </a:defRPr>
+                      </a:pPr>
+                      <a:r>
+                        <a:t>✅</a:t>
+                      </a:r>
+                    </a:p>
+                  </a:txBody>
+                  <a:tcPr>
+                    <a:solidFill>
+                      <a:srgbClr val="E8F0FA"/>
+                    </a:solidFill>
+                  </a:tcPr>
+                </a:tc>
+                <a:tc>
+                  <a:txBody>
+                    <a:bodyPr/>
+                    <a:lstStyle/>
+                    <a:p>
+                      <a:pPr algn="l">
+                        <a:defRPr sz="1200">
+                          <a:solidFill>
+                            <a:srgbClr val="000000"/>
+                          </a:solidFill>
+                          <a:latin typeface="SimHei"/>
+                        </a:defRPr>
+                      </a:pPr>
+                      <a:r>
+                        <a:t>ctrl+data+aux 正确配对</a:t>
+                      </a:r>
+                    </a:p>
+                  </a:txBody>
+                  <a:tcPr>
+                    <a:solidFill>
+                      <a:srgbClr val="E8F0FA"/>
+                    </a:solidFill>
+                  </a:tcPr>
+                </a:tc>
+              </a:tr>
+              <a:tr h="365760">
+                <a:tc>
+                  <a:txBody>
+                    <a:bodyPr/>
+                    <a:lstStyle/>
+                    <a:p>
+                      <a:pPr algn="l">
+                        <a:defRPr sz="1200">
+                          <a:solidFill>
+                            <a:srgbClr val="000000"/>
+                          </a:solidFill>
+                          <a:latin typeface="SimHei"/>
+                        </a:defRPr>
+                      </a:pPr>
+                      <a:r>
+                        <a:t>ETH SHM + TAP bridge</a:t>
+                      </a:r>
+                    </a:p>
+                  </a:txBody>
+                  <a:tcPr/>
+                </a:tc>
+                <a:tc>
+                  <a:txBody>
+                    <a:bodyPr/>
+                    <a:lstStyle/>
+                    <a:p>
+                      <a:pPr algn="l">
+                        <a:defRPr sz="1200">
+                          <a:solidFill>
+                            <a:srgbClr val="000000"/>
+                          </a:solidFill>
+                          <a:latin typeface="SimHei"/>
+                        </a:defRPr>
+                      </a:pPr>
+                      <a:r>
+                        <a:t>✅</a:t>
+                      </a:r>
+                    </a:p>
+                  </a:txBody>
+                  <a:tcPr/>
+                </a:tc>
+                <a:tc>
+                  <a:txBody>
+                    <a:bodyPr/>
+                    <a:lstStyle/>
+                    <a:p>
+                      <a:pPr algn="l">
+                        <a:defRPr sz="1200">
+                          <a:solidFill>
+                            <a:srgbClr val="000000"/>
+                          </a:solidFill>
+                          <a:latin typeface="SimHei"/>
+                        </a:defRPr>
+                      </a:pPr>
+                      <a:r>
+                        <a:t>/cosim_eth0 + cosim0 10.0.0.1</a:t>
+                      </a:r>
+                    </a:p>
+                  </a:txBody>
+                  <a:tcPr/>
+                </a:tc>
+              </a:tr>
+              <a:tr h="365760">
+                <a:tc>
+                  <a:txBody>
+                    <a:bodyPr/>
+                    <a:lstStyle/>
+                    <a:p>
+                      <a:pPr algn="l">
+                        <a:defRPr sz="1200">
+                          <a:solidFill>
+                            <a:srgbClr val="000000"/>
+                          </a:solidFill>
+                          <a:latin typeface="SimHei"/>
+                        </a:defRPr>
+                      </a:pPr>
+                      <a:r>
+                        <a:t>Guest boot + eth0</a:t>
+                      </a:r>
+                    </a:p>
+                  </a:txBody>
+                  <a:tcPr>
+                    <a:solidFill>
+                      <a:srgbClr val="E8F0FA"/>
+                    </a:solidFill>
+                  </a:tcPr>
+                </a:tc>
+                <a:tc>
+                  <a:txBody>
+                    <a:bodyPr/>
+                    <a:lstStyle/>
+                    <a:p>
+                      <a:pPr algn="l">
+                        <a:defRPr sz="1200">
+                          <a:solidFill>
+                            <a:srgbClr val="000000"/>
+                          </a:solidFill>
+                          <a:latin typeface="SimHei"/>
+                        </a:defRPr>
+                      </a:pPr>
+                      <a:r>
+                        <a:t>✅</a:t>
+                      </a:r>
+                    </a:p>
+                  </a:txBody>
+                  <a:tcPr>
+                    <a:solidFill>
+                      <a:srgbClr val="E8F0FA"/>
+                    </a:solidFill>
+                  </a:tcPr>
+                </a:tc>
+                <a:tc>
+                  <a:txBody>
+                    <a:bodyPr/>
+                    <a:lstStyle/>
+                    <a:p>
+                      <a:pPr algn="l">
+                        <a:defRPr sz="1200">
+                          <a:solidFill>
+                            <a:srgbClr val="000000"/>
+                          </a:solidFill>
+                          <a:latin typeface="SimHei"/>
+                        </a:defRPr>
+                      </a:pPr>
+                      <a:r>
+                        <a:t>buildroot + virtio_net 10.0.0.2</a:t>
+                      </a:r>
+                    </a:p>
+                  </a:txBody>
+                  <a:tcPr>
+                    <a:solidFill>
+                      <a:srgbClr val="E8F0FA"/>
+                    </a:solidFill>
+                  </a:tcPr>
+                </a:tc>
+              </a:tr>
+              <a:tr h="365760">
+                <a:tc>
+                  <a:txBody>
+                    <a:bodyPr/>
+                    <a:lstStyle/>
+                    <a:p>
+                      <a:pPr algn="l">
+                        <a:defRPr sz="1200">
+                          <a:solidFill>
+                            <a:srgbClr val="000000"/>
+                          </a:solidFill>
+                          <a:latin typeface="SimHei"/>
+                        </a:defRPr>
+                      </a:pPr>
+                      <a:r>
+                        <a:t>PCIe TLP 交换</a:t>
+                      </a:r>
+                    </a:p>
+                  </a:txBody>
+                  <a:tcPr/>
+                </a:tc>
+                <a:tc>
+                  <a:txBody>
+                    <a:bodyPr/>
+                    <a:lstStyle/>
+                    <a:p>
+                      <a:pPr algn="l">
+                        <a:defRPr sz="1200">
+                          <a:solidFill>
+                            <a:srgbClr val="000000"/>
+                          </a:solidFill>
+                          <a:latin typeface="SimHei"/>
+                        </a:defRPr>
+                      </a:pPr>
+                      <a:r>
+                        <a:t>✅</a:t>
+                      </a:r>
+                    </a:p>
+                  </a:txBody>
+                  <a:tcPr/>
+                </a:tc>
+                <a:tc>
+                  <a:txBody>
+                    <a:bodyPr/>
+                    <a:lstStyle/>
+                    <a:p>
+                      <a:pPr algn="l">
+                        <a:defRPr sz="1200">
+                          <a:solidFill>
+                            <a:srgbClr val="000000"/>
+                          </a:solidFill>
+                          <a:latin typeface="SimHei"/>
+                        </a:defRPr>
+                      </a:pPr>
+                      <a:r>
+                        <a:t>33000+ TLP 持续流动</a:t>
+                      </a:r>
+                    </a:p>
+                  </a:txBody>
+                  <a:tcPr/>
+                </a:tc>
+              </a:tr>
+              <a:tr h="365760">
+                <a:tc>
+                  <a:txBody>
+                    <a:bodyPr/>
+                    <a:lstStyle/>
+                    <a:p>
+                      <a:pPr algn="l">
+                        <a:defRPr sz="1200">
+                          <a:solidFill>
+                            <a:srgbClr val="000000"/>
+                          </a:solidFill>
+                          <a:latin typeface="SimHei"/>
+                        </a:defRPr>
+                      </a:pPr>
+                      <a:r>
+                        <a:t>Completion 回传</a:t>
+                      </a:r>
+                    </a:p>
+                  </a:txBody>
+                  <a:tcPr>
+                    <a:solidFill>
+                      <a:srgbClr val="E8F0FA"/>
+                    </a:solidFill>
+                  </a:tcPr>
+                </a:tc>
+                <a:tc>
+                  <a:txBody>
+                    <a:bodyPr/>
+                    <a:lstStyle/>
+                    <a:p>
+                      <a:pPr algn="l">
+                        <a:defRPr sz="1200">
+                          <a:solidFill>
+                            <a:srgbClr val="000000"/>
+                          </a:solidFill>
+                          <a:latin typeface="SimHei"/>
+                        </a:defRPr>
+                      </a:pPr>
+                      <a:r>
+                        <a:t>✅</a:t>
+                      </a:r>
+                    </a:p>
+                  </a:txBody>
+                  <a:tcPr>
+                    <a:solidFill>
+                      <a:srgbClr val="E8F0FA"/>
+                    </a:solidFill>
+                  </a:tcPr>
+                </a:tc>
+                <a:tc>
+                  <a:txBody>
+                    <a:bodyPr/>
+                    <a:lstStyle/>
+                    <a:p>
+                      <a:pPr algn="l">
+                        <a:defRPr sz="1200">
+                          <a:solidFill>
+                            <a:srgbClr val="000000"/>
+                          </a:solidFill>
+                          <a:latin typeface="SimHei"/>
+                        </a:defRPr>
+                      </a:pPr>
+                      <a:r>
+                        <a:t>30700+ CPL via handle_completion</a:t>
+                      </a:r>
+                    </a:p>
+                  </a:txBody>
+                  <a:tcPr>
+                    <a:solidFill>
+                      <a:srgbClr val="E8F0FA"/>
+                    </a:solidFill>
+                  </a:tcPr>
+                </a:tc>
+              </a:tr>
+              <a:tr h="365760">
+                <a:tc>
+                  <a:txBody>
+                    <a:bodyPr/>
+                    <a:lstStyle/>
+                    <a:p>
+                      <a:pPr algn="l">
+                        <a:defRPr sz="1200">
+                          <a:solidFill>
+                            <a:srgbClr val="000000"/>
+                          </a:solidFill>
+                          <a:latin typeface="SimHei"/>
+                        </a:defRPr>
+                      </a:pPr>
+                      <a:r>
+                        <a:t>DMA read (TCP)</a:t>
+                      </a:r>
+                    </a:p>
+                  </a:txBody>
+                  <a:tcPr/>
+                </a:tc>
+                <a:tc>
+                  <a:txBody>
+                    <a:bodyPr/>
+                    <a:lstStyle/>
+                    <a:p>
+                      <a:pPr algn="l">
+                        <a:defRPr sz="1200">
+                          <a:solidFill>
+                            <a:srgbClr val="000000"/>
+                          </a:solidFill>
+                          <a:latin typeface="SimHei"/>
+                        </a:defRPr>
+                      </a:pPr>
+                      <a:r>
+                        <a:t>✅</a:t>
+                      </a:r>
+                    </a:p>
+                  </a:txBody>
+                  <a:tcPr/>
+                </a:tc>
+                <a:tc>
+                  <a:txBody>
+                    <a:bodyPr/>
+                    <a:lstStyle/>
+                    <a:p>
+                      <a:pPr algn="l">
+                        <a:defRPr sz="1200">
+                          <a:solidFill>
+                            <a:srgbClr val="000000"/>
+                          </a:solidFill>
+                          <a:latin typeface="SimHei"/>
+                        </a:defRPr>
+                      </a:pPr>
+                      <a:r>
+                        <a:t>48 次成功</a:t>
+                      </a:r>
+                    </a:p>
+                  </a:txBody>
+                  <a:tcPr/>
+                </a:tc>
+              </a:tr>
+              <a:tr h="365760">
+                <a:tc>
+                  <a:txBody>
+                    <a:bodyPr/>
+                    <a:lstStyle/>
+                    <a:p>
+                      <a:pPr algn="l">
+                        <a:defRPr sz="1200">
+                          <a:solidFill>
+                            <a:srgbClr val="000000"/>
+                          </a:solidFill>
+                          <a:latin typeface="SimHei"/>
+                        </a:defRPr>
+                      </a:pPr>
+                      <a:r>
+                        <a:t>DMA write (TCP)</a:t>
+                      </a:r>
+                    </a:p>
+                  </a:txBody>
+                  <a:tcPr>
+                    <a:solidFill>
+                      <a:srgbClr val="E8F0FA"/>
+                    </a:solidFill>
+                  </a:tcPr>
+                </a:tc>
+                <a:tc>
+                  <a:txBody>
+                    <a:bodyPr/>
+                    <a:lstStyle/>
+                    <a:p>
+                      <a:pPr algn="l">
+                        <a:defRPr sz="1200">
+                          <a:solidFill>
+                            <a:srgbClr val="000000"/>
+                          </a:solidFill>
+                          <a:latin typeface="SimHei"/>
+                        </a:defRPr>
+                      </a:pPr>
+                      <a:r>
+                        <a:t>✅</a:t>
+                      </a:r>
+                    </a:p>
+                  </a:txBody>
+                  <a:tcPr>
+                    <a:solidFill>
+                      <a:srgbClr val="E8F0FA"/>
+                    </a:solidFill>
+                  </a:tcPr>
+                </a:tc>
+                <a:tc>
+                  <a:txBody>
+                    <a:bodyPr/>
+                    <a:lstStyle/>
+                    <a:p>
+                      <a:pPr algn="l">
+                        <a:defRPr sz="1200">
+                          <a:solidFill>
+                            <a:srgbClr val="000000"/>
+                          </a:solidFill>
+                          <a:latin typeface="SimHei"/>
+                        </a:defRPr>
+                      </a:pPr>
+                      <a:r>
+                        <a:t>51 次成功</a:t>
+                      </a:r>
+                    </a:p>
+                  </a:txBody>
+                  <a:tcPr>
+                    <a:solidFill>
+                      <a:srgbClr val="E8F0FA"/>
+                    </a:solidFill>
+                  </a:tcPr>
+                </a:tc>
+              </a:tr>
+              <a:tr h="365760">
+                <a:tc>
+                  <a:txBody>
+                    <a:bodyPr/>
+                    <a:lstStyle/>
+                    <a:p>
+                      <a:pPr algn="l">
+                        <a:defRPr sz="1200">
+                          <a:solidFill>
+                            <a:srgbClr val="000000"/>
+                          </a:solidFill>
+                          <a:latin typeface="SimHei"/>
+                        </a:defRPr>
+                      </a:pPr>
+                      <a:r>
+                        <a:t>MSI 中断注入</a:t>
+                      </a:r>
+                    </a:p>
+                  </a:txBody>
+                  <a:tcPr/>
+                </a:tc>
+                <a:tc>
+                  <a:txBody>
+                    <a:bodyPr/>
+                    <a:lstStyle/>
+                    <a:p>
+                      <a:pPr algn="l">
+                        <a:defRPr sz="1200">
+                          <a:solidFill>
+                            <a:srgbClr val="000000"/>
+                          </a:solidFill>
+                          <a:latin typeface="SimHei"/>
+                        </a:defRPr>
+                      </a:pPr>
+                      <a:r>
+                        <a:t>✅</a:t>
+                      </a:r>
+                    </a:p>
+                  </a:txBody>
+                  <a:tcPr/>
+                </a:tc>
+                <a:tc>
+                  <a:txBody>
+                    <a:bodyPr/>
+                    <a:lstStyle/>
+                    <a:p>
+                      <a:pPr algn="l">
+                        <a:defRPr sz="1200">
+                          <a:solidFill>
+                            <a:srgbClr val="000000"/>
+                          </a:solidFill>
+                          <a:latin typeface="SimHei"/>
+                        </a:defRPr>
+                      </a:pPr>
+                      <a:r>
+                        <a:t>12 次 pci_set_irq</a:t>
+                      </a:r>
+                    </a:p>
+                  </a:txBody>
+                  <a:tcPr/>
+                </a:tc>
+              </a:tr>
+              <a:tr h="365760">
+                <a:tc>
+                  <a:txBody>
+                    <a:bodyPr/>
+                    <a:lstStyle/>
+                    <a:p>
+                      <a:pPr algn="l">
+                        <a:defRPr sz="1200">
+                          <a:solidFill>
+                            <a:srgbClr val="000000"/>
+                          </a:solidFill>
+                          <a:latin typeface="SimHei"/>
+                        </a:defRPr>
+                      </a:pPr>
+                      <a:r>
+                        <a:t>VQ-TX → ETH SHM → TAP</a:t>
+                      </a:r>
+                    </a:p>
+                  </a:txBody>
+                  <a:tcPr>
+                    <a:solidFill>
+                      <a:srgbClr val="E8F0FA"/>
+                    </a:solidFill>
+                  </a:tcPr>
+                </a:tc>
+                <a:tc>
+                  <a:txBody>
+                    <a:bodyPr/>
+                    <a:lstStyle/>
+                    <a:p>
+                      <a:pPr algn="l">
+                        <a:defRPr sz="1200">
+                          <a:solidFill>
+                            <a:srgbClr val="000000"/>
+                          </a:solidFill>
+                          <a:latin typeface="SimHei"/>
+                        </a:defRPr>
+                      </a:pPr>
+                      <a:r>
+                        <a:t>✅</a:t>
+                      </a:r>
+                    </a:p>
+                  </a:txBody>
+                  <a:tcPr>
+                    <a:solidFill>
+                      <a:srgbClr val="E8F0FA"/>
+                    </a:solidFill>
+                  </a:tcPr>
+                </a:tc>
+                <a:tc>
+                  <a:txBody>
+                    <a:bodyPr/>
+                    <a:lstStyle/>
+                    <a:p>
+                      <a:pPr algn="l">
+                        <a:defRPr sz="1200">
+                          <a:solidFill>
+                            <a:srgbClr val="000000"/>
+                          </a:solidFill>
+                          <a:latin typeface="SimHei"/>
+                        </a:defRPr>
+                      </a:pPr>
+                      <a:r>
+                        <a:t>4 包转发成功</a:t>
+                      </a:r>
+                    </a:p>
+                  </a:txBody>
+                  <a:tcPr>
+                    <a:solidFill>
+                      <a:srgbClr val="E8F0FA"/>
+                    </a:solidFill>
+                  </a:tcPr>
+                </a:tc>
+              </a:tr>
+              <a:tr h="365760">
+                <a:tc>
+                  <a:txBody>
+                    <a:bodyPr/>
+                    <a:lstStyle/>
+                    <a:p>
+                      <a:pPr algn="l">
+                        <a:defRPr sz="1200">
+                          <a:solidFill>
+                            <a:srgbClr val="000000"/>
+                          </a:solidFill>
+                          <a:latin typeface="SimHei"/>
+                        </a:defRPr>
+                      </a:pPr>
+                      <a:r>
+                        <a:t>TAP → ETH SHM → VQ-RX</a:t>
+                      </a:r>
+                    </a:p>
+                  </a:txBody>
+                  <a:tcPr/>
+                </a:tc>
+                <a:tc>
+                  <a:txBody>
+                    <a:bodyPr/>
+                    <a:lstStyle/>
+                    <a:p>
+                      <a:pPr algn="l">
+                        <a:defRPr sz="1200">
+                          <a:solidFill>
+                            <a:srgbClr val="000000"/>
+                          </a:solidFill>
+                          <a:latin typeface="SimHei"/>
+                        </a:defRPr>
+                      </a:pPr>
+                      <a:r>
+                        <a:t>✅</a:t>
+                      </a:r>
+                    </a:p>
+                  </a:txBody>
+                  <a:tcPr/>
+                </a:tc>
+                <a:tc>
+                  <a:txBody>
+                    <a:bodyPr/>
+                    <a:lstStyle/>
+                    <a:p>
+                      <a:pPr algn="l">
+                        <a:defRPr sz="1200">
+                          <a:solidFill>
+                            <a:srgbClr val="000000"/>
+                          </a:solidFill>
+                          <a:latin typeface="SimHei"/>
+                        </a:defRPr>
+                      </a:pPr>
+                      <a:r>
+                        <a:t>11 包注入成功</a:t>
+                      </a:r>
+                    </a:p>
+                  </a:txBody>
+                  <a:tcPr/>
+                </a:tc>
+              </a:tr>
+              <a:tr h="365760">
+                <a:tc>
+                  <a:txBody>
+                    <a:bodyPr/>
+                    <a:lstStyle/>
+                    <a:p>
+                      <a:pPr algn="l">
+                        <a:defRPr sz="1200">
+                          <a:solidFill>
+                            <a:srgbClr val="000000"/>
+                          </a:solidFill>
+                          <a:latin typeface="SimHei"/>
+                        </a:defRPr>
+                      </a:pPr>
+                      <a:r>
+                        <a:t>Virtio 数据面</a:t>
+                      </a:r>
+                    </a:p>
+                  </a:txBody>
+                  <a:tcPr>
+                    <a:solidFill>
+                      <a:srgbClr val="E8F0FA"/>
+                    </a:solidFill>
+                  </a:tcPr>
+                </a:tc>
+                <a:tc>
+                  <a:txBody>
+                    <a:bodyPr/>
+                    <a:lstStyle/>
+                    <a:p>
+                      <a:pPr algn="l">
+                        <a:defRPr sz="1200">
+                          <a:solidFill>
+                            <a:srgbClr val="000000"/>
+                          </a:solidFill>
+                          <a:latin typeface="SimHei"/>
+                        </a:defRPr>
+                      </a:pPr>
+                      <a:r>
+                        <a:t>✅</a:t>
+                      </a:r>
+                    </a:p>
+                  </a:txBody>
+                  <a:tcPr>
+                    <a:solidFill>
+                      <a:srgbClr val="E8F0FA"/>
+                    </a:solidFill>
+                  </a:tcPr>
+                </a:tc>
+                <a:tc>
+                  <a:txBody>
+                    <a:bodyPr/>
+                    <a:lstStyle/>
+                    <a:p>
+                      <a:pPr algn="l">
+                        <a:defRPr sz="1200">
+                          <a:solidFill>
+                            <a:srgbClr val="000000"/>
+                          </a:solidFill>
+                          <a:latin typeface="SimHei"/>
+                        </a:defRPr>
+                      </a:pPr>
+                      <a:r>
+                        <a:t>双向数据面完全打通</a:t>
+                      </a:r>
+                    </a:p>
+                  </a:txBody>
+                  <a:tcPr>
+                    <a:solidFill>
+                      <a:srgbClr val="E8F0FA"/>
+                    </a:solidFill>
+                  </a:tcPr>
+                </a:tc>
+              </a:tr>
+            </a:tbl>
+          </a:graphicData>
+        </a:graphic>
+      </p:graphicFrame>
+    </p:spTree>
+  </p:cSld>
+  <p:clrMapOvr>
+    <a:masterClrMapping/>
+  </p:clrMapOvr>
+</p:sld>
+</file>
+
+<file path=ppt/slides/slide13.xml><?xml version="1.0" encoding="utf-8"?>
+<p:sld xmlns:a="http://schemas.openxmlformats.org/drawingml/2006/main" xmlns:p="http://schemas.openxmlformats.org/presentationml/2006/main" xmlns:r="http://schemas.openxmlformats.org/officeDocument/2006/relationships">
+  <p:cSld>
+    <p:spTree>
+      <p:nvGrpSpPr>
+        <p:cNvPr id="1" name=""/>
+        <p:cNvGrpSpPr/>
+        <p:nvPr/>
+      </p:nvGrpSpPr>
+      <p:grpSpPr/>
+      <p:sp>
+        <p:nvSpPr>
+          <p:cNvPr id="2" name="TextBox 1"/>
+          <p:cNvSpPr txBox="1"/>
+          <p:nvPr/>
+        </p:nvSpPr>
+        <p:spPr>
+          <a:xfrm>
+            <a:off x="0" y="0"/>
+            <a:ext cx="9144000" cy="822960"/>
+          </a:xfrm>
+          <a:prstGeom prst="rect">
+            <a:avLst/>
+          </a:prstGeom>
+          <a:noFill/>
+        </p:spPr>
+        <p:txBody>
+          <a:bodyPr wrap="none" lIns="457200" anchor="ctr">
+            <a:spAutoFit/>
+          </a:bodyPr>
+          <a:lstStyle/>
+          <a:p>
+            <a:pPr algn="l">
+              <a:defRPr sz="2400" b="1">
+                <a:solidFill>
+                  <a:srgbClr val="002B5C"/>
+                </a:solidFill>
+                <a:latin typeface="SimHei"/>
+              </a:defRPr>
+            </a:pPr>
+            <a:r>
+              <a:t>修复提交记录 (共 8 个 commit)</a:t>
+            </a:r>
+          </a:p>
+        </p:txBody>
+      </p:sp>
+      <p:sp>
+        <p:nvSpPr>
+          <p:cNvPr id="3" name="TextBox 2"/>
+          <p:cNvSpPr txBox="1"/>
+          <p:nvPr/>
+        </p:nvSpPr>
+        <p:spPr>
+          <a:xfrm>
+            <a:off x="457200" y="1005840"/>
+            <a:ext cx="8229600" cy="5486400"/>
+          </a:xfrm>
+          <a:prstGeom prst="rect">
+            <a:avLst/>
+          </a:prstGeom>
+          <a:noFill/>
+        </p:spPr>
+        <p:txBody>
+          <a:bodyPr wrap="square">
+            <a:spAutoFit/>
+          </a:bodyPr>
+          <a:lstStyle/>
+          <a:p>
+            <a:pPr>
+              <a:spcBef>
+                <a:spcPts val="600"/>
+              </a:spcBef>
+              <a:defRPr sz="1500">
+                <a:solidFill>
+                  <a:srgbClr val="333333"/>
+                </a:solidFill>
+                <a:latin typeface="SimHei"/>
+              </a:defRPr>
+            </a:pPr>
+            <a:r>
+              <a:t>1. feat(setup): cosim.sh TCP/drive 参数 + setup.sh TAP/VCS 修正</a:t>
+            </a:r>
+          </a:p>
+          <a:p>
+            <a:pPr>
+              <a:spcBef>
+                <a:spcPts val="600"/>
+              </a:spcBef>
+              <a:defRPr sz="1500">
+                <a:solidFill>
+                  <a:srgbClr val="333333"/>
+                </a:solidFill>
+                <a:latin typeface="SimHei"/>
+              </a:defRPr>
+            </a:pPr>
+            <a:r>
+              <a:t>2. fix(vcs): make vcs-vip + MSI 注入 + resolve_simv 路径</a:t>
+            </a:r>
+          </a:p>
+          <a:p>
+            <a:pPr>
+              <a:spcBef>
+                <a:spcPts val="600"/>
+              </a:spcBef>
+              <a:defRPr sz="1500">
+                <a:solidFill>
+                  <a:srgbClr val="333333"/>
+                </a:solidFill>
+                <a:latin typeface="SimHei"/>
+              </a:defRPr>
+            </a:pPr>
+            <a:r>
+              <a:t>3. fix(glue): stub_isr_set output→input 消除多驱动冲突</a:t>
+            </a:r>
+          </a:p>
+          <a:p>
+            <a:pPr>
+              <a:spcBef>
+                <a:spcPts val="600"/>
+              </a:spcBef>
+              <a:defRPr sz="1500">
+                <a:solidFill>
+                  <a:srgbClr val="333333"/>
+                </a:solidFill>
+                <a:latin typeface="SimHei"/>
+              </a:defRPr>
+            </a:pPr>
+            <a:r>
+              <a:t>4. fix(vip): handle_completion 覆盖回传 QEMU</a:t>
+            </a:r>
+          </a:p>
+          <a:p>
+            <a:pPr>
+              <a:spcBef>
+                <a:spcPts val="600"/>
+              </a:spcBef>
+              <a:defRPr sz="1500">
+                <a:solidFill>
+                  <a:srgbClr val="333333"/>
+                </a:solidFill>
+                <a:latin typeface="SimHei"/>
+              </a:defRPr>
+            </a:pPr>
+            <a:r>
+              <a:t>5. fix(tcp): TLP ring buffer 缓存 + 自适应 poll 超时</a:t>
+            </a:r>
+          </a:p>
+          <a:p>
+            <a:pPr>
+              <a:spcBef>
+                <a:spcPts val="600"/>
+              </a:spcBef>
+              <a:defRPr sz="1500">
+                <a:solidFill>
+                  <a:srgbClr val="333333"/>
+                </a:solidFill>
+                <a:latin typeface="SimHei"/>
+              </a:defRPr>
+            </a:pPr>
+            <a:r>
+              <a:t>6. fix(vip): NOTIFY always_ff→initial event 解除仿真冻结</a:t>
+            </a:r>
+          </a:p>
+          <a:p>
+            <a:pPr>
+              <a:spcBef>
+                <a:spcPts val="600"/>
+              </a:spcBef>
+              <a:defRPr sz="1500">
+                <a:solidFill>
+                  <a:srgbClr val="333333"/>
+                </a:solidFill>
+                <a:latin typeface="SimHei"/>
+              </a:defRPr>
+            </a:pPr>
+            <a:r>
+              <a:t>7. fix(tcp): _nb 函数 MSG_PEEK 避免 aux 协议错位</a:t>
+            </a:r>
+          </a:p>
+          <a:p>
+            <a:pPr>
+              <a:spcBef>
+                <a:spcPts val="600"/>
+              </a:spcBef>
+              <a:defRPr sz="1500">
+                <a:solidFill>
+                  <a:srgbClr val="333333"/>
+                </a:solidFill>
+                <a:latin typeface="SimHei"/>
+              </a:defRPr>
+            </a:pPr>
+            <a:r>
+              <a:t>8. fix(tcp): dma_write_bytes 先 DMA_REQ 再 DMA_DATA [关键突破]</a:t>
+            </a:r>
+          </a:p>
+        </p:txBody>
+      </p:sp>
+    </p:spTree>
+  </p:cSld>
+  <p:clrMapOvr>
+    <a:masterClrMapping/>
+  </p:clrMapOvr>
+</p:sld>
+</file>
+
+<file path=ppt/slides/slide14.xml><?xml version="1.0" encoding="utf-8"?>
+<p:sld xmlns:a="http://schemas.openxmlformats.org/drawingml/2006/main" xmlns:p="http://schemas.openxmlformats.org/presentationml/2006/main" xmlns:r="http://schemas.openxmlformats.org/officeDocument/2006/relationships">
+  <p:cSld>
+    <p:spTree>
+      <p:nvGrpSpPr>
+        <p:cNvPr id="1" name=""/>
+        <p:cNvGrpSpPr/>
+        <p:nvPr/>
+      </p:nvGrpSpPr>
+      <p:grpSpPr/>
+      <p:sp>
+        <p:nvSpPr>
+          <p:cNvPr id="2" name="TextBox 1"/>
+          <p:cNvSpPr txBox="1"/>
+          <p:nvPr/>
+        </p:nvSpPr>
+        <p:spPr>
+          <a:xfrm>
+            <a:off x="0" y="0"/>
+            <a:ext cx="9144000" cy="822960"/>
+          </a:xfrm>
+          <a:prstGeom prst="rect">
+            <a:avLst/>
+          </a:prstGeom>
+          <a:noFill/>
+        </p:spPr>
+        <p:txBody>
+          <a:bodyPr wrap="none" lIns="457200" anchor="ctr">
+            <a:spAutoFit/>
+          </a:bodyPr>
+          <a:lstStyle/>
+          <a:p>
+            <a:pPr algn="l">
+              <a:defRPr sz="2400" b="1">
+                <a:solidFill>
+                  <a:srgbClr val="002B5C"/>
+                </a:solidFill>
+                <a:latin typeface="SimHei"/>
+              </a:defRPr>
+            </a:pPr>
+            <a:r>
+              <a:t>结论: Virtio 数据面完全打通</a:t>
+            </a:r>
+          </a:p>
+        </p:txBody>
+      </p:sp>
+      <p:sp>
+        <p:nvSpPr>
+          <p:cNvPr id="3" name="TextBox 2"/>
+          <p:cNvSpPr txBox="1"/>
+          <p:nvPr/>
+        </p:nvSpPr>
+        <p:spPr>
+          <a:xfrm>
+            <a:off x="457200" y="1005840"/>
+            <a:ext cx="8229600" cy="5486400"/>
+          </a:xfrm>
+          <a:prstGeom prst="rect">
+            <a:avLst/>
+          </a:prstGeom>
+          <a:noFill/>
+        </p:spPr>
+        <p:txBody>
+          <a:bodyPr wrap="square">
+            <a:spAutoFit/>
+          </a:bodyPr>
+          <a:lstStyle/>
+          <a:p>
+            <a:pPr>
+              <a:spcBef>
+                <a:spcPts val="600"/>
+              </a:spcBef>
+              <a:defRPr sz="1500">
+                <a:solidFill>
+                  <a:srgbClr val="333333"/>
+                </a:solidFill>
+                <a:latin typeface="SimHei"/>
+              </a:defRPr>
+            </a:pPr>
+            <a:r>
+              <a:t>跨机 TCP 模式 (53 QEMU ↔ 61 VCS) 端到端数据面已打通:</a:t>
+            </a:r>
+          </a:p>
+          <a:p>
+            <a:pPr>
+              <a:spcBef>
+                <a:spcPts val="600"/>
+              </a:spcBef>
+              <a:defRPr sz="1500">
+                <a:solidFill>
+                  <a:srgbClr val="333333"/>
+                </a:solidFill>
+                <a:latin typeface="SimHei"/>
+              </a:defRPr>
+            </a:pPr>
+          </a:p>
+          <a:p>
+            <a:pPr>
+              <a:spcBef>
+                <a:spcPts val="600"/>
+              </a:spcBef>
+              <a:defRPr sz="1500">
+                <a:solidFill>
+                  <a:srgbClr val="333333"/>
+                </a:solidFill>
+                <a:latin typeface="SimHei"/>
+              </a:defRPr>
+            </a:pPr>
+            <a:r>
+              <a:t>  Guest TX: virtio_net → NOTIFY → VQ-TX → DMA read → ETH SHM → TAP</a:t>
+            </a:r>
+          </a:p>
+          <a:p>
+            <a:pPr>
+              <a:spcBef>
+                <a:spcPts val="600"/>
+              </a:spcBef>
+              <a:defRPr sz="1500">
+                <a:solidFill>
+                  <a:srgbClr val="333333"/>
+                </a:solidFill>
+                <a:latin typeface="SimHei"/>
+              </a:defRPr>
+            </a:pPr>
+            <a:r>
+              <a:t>  Guest RX: TAP → ETH SHM → VQ-RX → DMA write → MSI → virtio_net</a:t>
+            </a:r>
+          </a:p>
+          <a:p>
+            <a:pPr>
+              <a:spcBef>
+                <a:spcPts val="600"/>
+              </a:spcBef>
+              <a:defRPr sz="1500">
+                <a:solidFill>
+                  <a:srgbClr val="333333"/>
+                </a:solidFill>
+                <a:latin typeface="SimHei"/>
+              </a:defRPr>
+            </a:pPr>
+          </a:p>
+          <a:p>
+            <a:pPr>
+              <a:spcBef>
+                <a:spcPts val="600"/>
+              </a:spcBef>
+              <a:defRPr sz="1500">
+                <a:solidFill>
+                  <a:srgbClr val="333333"/>
+                </a:solidFill>
+                <a:latin typeface="SimHei"/>
+              </a:defRPr>
+            </a:pPr>
+            <a:r>
+              <a:t>验证数据 (持续运行中):</a:t>
+            </a:r>
+          </a:p>
+          <a:p>
+            <a:pPr>
+              <a:spcBef>
+                <a:spcPts val="600"/>
+              </a:spcBef>
+              <a:defRPr sz="1500">
+                <a:solidFill>
+                  <a:srgbClr val="333333"/>
+                </a:solidFill>
+                <a:latin typeface="SimHei"/>
+              </a:defRPr>
+            </a:pPr>
+            <a:r>
+              <a:t>  TLP: 33000+  |  Completion: 30700+  |  NOTIFY: 10</a:t>
+            </a:r>
+          </a:p>
+          <a:p>
+            <a:pPr>
+              <a:spcBef>
+                <a:spcPts val="600"/>
+              </a:spcBef>
+              <a:defRPr sz="1500">
+                <a:solidFill>
+                  <a:srgbClr val="333333"/>
+                </a:solidFill>
+                <a:latin typeface="SimHei"/>
+              </a:defRPr>
+            </a:pPr>
+            <a:r>
+              <a:t>  DMA read: 48  |  DMA write: 51  |  MSI: 12</a:t>
+            </a:r>
+          </a:p>
+          <a:p>
+            <a:pPr>
+              <a:spcBef>
+                <a:spcPts val="600"/>
+              </a:spcBef>
+              <a:defRPr sz="1500">
+                <a:solidFill>
+                  <a:srgbClr val="333333"/>
+                </a:solidFill>
+                <a:latin typeface="SimHei"/>
+              </a:defRPr>
+            </a:pPr>
+            <a:r>
+              <a:t>  TX Forwarded: 4  |  RX Injected: 11</a:t>
+            </a:r>
+          </a:p>
+          <a:p>
+            <a:pPr>
+              <a:spcBef>
+                <a:spcPts val="600"/>
+              </a:spcBef>
+              <a:defRPr sz="1500">
+                <a:solidFill>
+                  <a:srgbClr val="333333"/>
+                </a:solidFill>
+                <a:latin typeface="SimHei"/>
+              </a:defRPr>
+            </a:pPr>
+          </a:p>
+          <a:p>
+            <a:pPr>
+              <a:spcBef>
+                <a:spcPts val="600"/>
+              </a:spcBef>
+              <a:defRPr sz="1500">
+                <a:solidFill>
+                  <a:srgbClr val="333333"/>
+                </a:solidFill>
+                <a:latin typeface="SimHei"/>
+              </a:defRPr>
+            </a:pPr>
+            <a:r>
+              <a:t>瓶颈: VCS RTL 仿真速度 (~5000 TLP/min)</a:t>
+            </a:r>
+          </a:p>
+          <a:p>
+            <a:pPr>
+              <a:spcBef>
+                <a:spcPts val="600"/>
+              </a:spcBef>
+              <a:defRPr sz="1500">
+                <a:solidFill>
+                  <a:srgbClr val="333333"/>
+                </a:solidFill>
+                <a:latin typeface="SimHei"/>
+              </a:defRPr>
+            </a:pPr>
+            <a:r>
+              <a:t>  200 个 ping 需要数小时完成</a:t>
+            </a:r>
+          </a:p>
+          <a:p>
+            <a:pPr>
+              <a:spcBef>
+                <a:spcPts val="600"/>
+              </a:spcBef>
+              <a:defRPr sz="1500">
+                <a:solidFill>
+                  <a:srgbClr val="333333"/>
+                </a:solidFill>
+                <a:latin typeface="SimHei"/>
+              </a:defRPr>
+            </a:pPr>
+            <a:r>
+              <a:t>  非代码问题，可通过 VCS 编译优化或换仿真器改善</a:t>
             </a:r>
           </a:p>
         </p:txBody>
@@ -3794,7 +5207,7 @@
         </p:nvGraphicFramePr>
         <p:xfrm>
           <a:off x="365760" y="1097280"/>
-          <a:ext cx="8412480" cy="3291840"/>
+          <a:ext cx="8412480" cy="4389120"/>
         </p:xfrm>
         <a:graphic>
           <a:graphicData uri="http://schemas.openxmlformats.org/drawingml/2006/table">
@@ -4615,7 +6028,7 @@
                         </a:defRPr>
                       </a:pPr>
                       <a:r>
-                        <a:t>🔍 分析中</a:t>
+                        <a:t>✅ 已修复</a:t>
                       </a:r>
                     </a:p>
                   </a:txBody>
@@ -4624,6 +6037,268 @@
                       <a:srgbClr val="E8F0FA"/>
                     </a:solidFill>
                   </a:tcPr>
+                </a:tc>
+              </a:tr>
+              <a:tr h="365760">
+                <a:tc>
+                  <a:txBody>
+                    <a:bodyPr/>
+                    <a:lstStyle/>
+                    <a:p>
+                      <a:pPr algn="l">
+                        <a:defRPr sz="1200">
+                          <a:solidFill>
+                            <a:srgbClr val="000000"/>
+                          </a:solidFill>
+                          <a:latin typeface="SimHei"/>
+                        </a:defRPr>
+                      </a:pPr>
+                      <a:r>
+                        <a:t>9</a:t>
+                      </a:r>
+                    </a:p>
+                  </a:txBody>
+                  <a:tcPr/>
+                </a:tc>
+                <a:tc>
+                  <a:txBody>
+                    <a:bodyPr/>
+                    <a:lstStyle/>
+                    <a:p>
+                      <a:pPr algn="l">
+                        <a:defRPr sz="1200">
+                          <a:solidFill>
+                            <a:srgbClr val="000000"/>
+                          </a:solidFill>
+                          <a:latin typeface="SimHei"/>
+                        </a:defRPr>
+                      </a:pPr>
+                      <a:r>
+                        <a:t>NOTIFY 在 always_ff 中调阻塞 DPI-C 冻结仿真</a:t>
+                      </a:r>
+                    </a:p>
+                  </a:txBody>
+                  <a:tcPr/>
+                </a:tc>
+                <a:tc>
+                  <a:txBody>
+                    <a:bodyPr/>
+                    <a:lstStyle/>
+                    <a:p>
+                      <a:pPr algn="l">
+                        <a:defRPr sz="1200">
+                          <a:solidFill>
+                            <a:srgbClr val="000000"/>
+                          </a:solidFill>
+                          <a:latin typeface="SimHei"/>
+                        </a:defRPr>
+                      </a:pPr>
+                      <a:r>
+                        <a:t>严重</a:t>
+                      </a:r>
+                    </a:p>
+                  </a:txBody>
+                  <a:tcPr/>
+                </a:tc>
+                <a:tc>
+                  <a:txBody>
+                    <a:bodyPr/>
+                    <a:lstStyle/>
+                    <a:p>
+                      <a:pPr algn="l">
+                        <a:defRPr sz="1200">
+                          <a:solidFill>
+                            <a:srgbClr val="000000"/>
+                          </a:solidFill>
+                          <a:latin typeface="SimHei"/>
+                        </a:defRPr>
+                      </a:pPr>
+                      <a:r>
+                        <a:t>✅ 已修复</a:t>
+                      </a:r>
+                    </a:p>
+                  </a:txBody>
+                  <a:tcPr/>
+                </a:tc>
+              </a:tr>
+              <a:tr h="365760">
+                <a:tc>
+                  <a:txBody>
+                    <a:bodyPr/>
+                    <a:lstStyle/>
+                    <a:p>
+                      <a:pPr algn="l">
+                        <a:defRPr sz="1200">
+                          <a:solidFill>
+                            <a:srgbClr val="000000"/>
+                          </a:solidFill>
+                          <a:latin typeface="SimHei"/>
+                        </a:defRPr>
+                      </a:pPr>
+                      <a:r>
+                        <a:t>10</a:t>
+                      </a:r>
+                    </a:p>
+                  </a:txBody>
+                  <a:tcPr>
+                    <a:solidFill>
+                      <a:srgbClr val="E8F0FA"/>
+                    </a:solidFill>
+                  </a:tcPr>
+                </a:tc>
+                <a:tc>
+                  <a:txBody>
+                    <a:bodyPr/>
+                    <a:lstStyle/>
+                    <a:p>
+                      <a:pPr algn="l">
+                        <a:defRPr sz="1200">
+                          <a:solidFill>
+                            <a:srgbClr val="000000"/>
+                          </a:solidFill>
+                          <a:latin typeface="SimHei"/>
+                        </a:defRPr>
+                      </a:pPr>
+                      <a:r>
+                        <a:t>_nb 函数消费不匹配消息导致 aux channel 协议错位</a:t>
+                      </a:r>
+                    </a:p>
+                  </a:txBody>
+                  <a:tcPr>
+                    <a:solidFill>
+                      <a:srgbClr val="E8F0FA"/>
+                    </a:solidFill>
+                  </a:tcPr>
+                </a:tc>
+                <a:tc>
+                  <a:txBody>
+                    <a:bodyPr/>
+                    <a:lstStyle/>
+                    <a:p>
+                      <a:pPr algn="l">
+                        <a:defRPr sz="1200">
+                          <a:solidFill>
+                            <a:srgbClr val="000000"/>
+                          </a:solidFill>
+                          <a:latin typeface="SimHei"/>
+                        </a:defRPr>
+                      </a:pPr>
+                      <a:r>
+                        <a:t>严重</a:t>
+                      </a:r>
+                    </a:p>
+                  </a:txBody>
+                  <a:tcPr>
+                    <a:solidFill>
+                      <a:srgbClr val="E8F0FA"/>
+                    </a:solidFill>
+                  </a:tcPr>
+                </a:tc>
+                <a:tc>
+                  <a:txBody>
+                    <a:bodyPr/>
+                    <a:lstStyle/>
+                    <a:p>
+                      <a:pPr algn="l">
+                        <a:defRPr sz="1200">
+                          <a:solidFill>
+                            <a:srgbClr val="000000"/>
+                          </a:solidFill>
+                          <a:latin typeface="SimHei"/>
+                        </a:defRPr>
+                      </a:pPr>
+                      <a:r>
+                        <a:t>✅ 已修复</a:t>
+                      </a:r>
+                    </a:p>
+                  </a:txBody>
+                  <a:tcPr>
+                    <a:solidFill>
+                      <a:srgbClr val="E8F0FA"/>
+                    </a:solidFill>
+                  </a:tcPr>
+                </a:tc>
+              </a:tr>
+              <a:tr h="365760">
+                <a:tc>
+                  <a:txBody>
+                    <a:bodyPr/>
+                    <a:lstStyle/>
+                    <a:p>
+                      <a:pPr algn="l">
+                        <a:defRPr sz="1200">
+                          <a:solidFill>
+                            <a:srgbClr val="000000"/>
+                          </a:solidFill>
+                          <a:latin typeface="SimHei"/>
+                        </a:defRPr>
+                      </a:pPr>
+                      <a:r>
+                        <a:t>11</a:t>
+                      </a:r>
+                    </a:p>
+                  </a:txBody>
+                  <a:tcPr/>
+                </a:tc>
+                <a:tc>
+                  <a:txBody>
+                    <a:bodyPr/>
+                    <a:lstStyle/>
+                    <a:p>
+                      <a:pPr algn="l">
+                        <a:defRPr sz="1200">
+                          <a:solidFill>
+                            <a:srgbClr val="000000"/>
+                          </a:solidFill>
+                          <a:latin typeface="SimHei"/>
+                        </a:defRPr>
+                      </a:pPr>
+                      <a:r>
+                        <a:t>dma_write_bytes 先发 DMA_DATA 堵住 aux channel</a:t>
+                      </a:r>
+                    </a:p>
+                  </a:txBody>
+                  <a:tcPr/>
+                </a:tc>
+                <a:tc>
+                  <a:txBody>
+                    <a:bodyPr/>
+                    <a:lstStyle/>
+                    <a:p>
+                      <a:pPr algn="l">
+                        <a:defRPr sz="1200">
+                          <a:solidFill>
+                            <a:srgbClr val="000000"/>
+                          </a:solidFill>
+                          <a:latin typeface="SimHei"/>
+                        </a:defRPr>
+                      </a:pPr>
+                      <a:r>
+                        <a:t>严重</a:t>
+                      </a:r>
+                    </a:p>
+                  </a:txBody>
+                  <a:tcPr/>
+                </a:tc>
+                <a:tc>
+                  <a:txBody>
+                    <a:bodyPr/>
+                    <a:lstStyle/>
+                    <a:p>
+                      <a:pPr algn="l">
+                        <a:defRPr sz="1200">
+                          <a:solidFill>
+                            <a:srgbClr val="000000"/>
+                          </a:solidFill>
+                          <a:latin typeface="SimHei"/>
+                        </a:defRPr>
+                      </a:pPr>
+                      <a:r>
+                        <a:t>✅ 已修复</a:t>
+                      </a:r>
+                    </a:p>
+                  </a:txBody>
+                  <a:tcPr/>
                 </a:tc>
               </a:tr>
             </a:tbl>
@@ -5725,7 +7400,7 @@
               </a:defRPr>
             </a:pPr>
             <a:r>
-              <a:t>问题 8: TCP Transport DMA Read 消息交错 [分析中]</a:t>
+              <a:t>问题 8: TCP DMA Read TLP 缓存</a:t>
             </a:r>
           </a:p>
         </p:txBody>
@@ -5764,193 +7439,100 @@
               </a:defRPr>
             </a:pPr>
             <a:r>
-              <a:t>现象: QEMU 发 278 个 TLP, VCS 只处理 208 个, 之后停滞</a:t>
-            </a:r>
-          </a:p>
-          <a:p>
-            <a:pPr>
-              <a:spcBef>
-                <a:spcPts val="600"/>
-              </a:spcBef>
-              <a:defRPr sz="1500">
-                <a:solidFill>
-                  <a:srgbClr val="333333"/>
-                </a:solidFill>
-                <a:latin typeface="SimHei"/>
-              </a:defRPr>
-            </a:pPr>
-            <a:r>
-              <a:t>  QEMU 阻塞在 MRd(addr=0x1014 device_status) 等 completion</a:t>
-            </a:r>
-          </a:p>
-          <a:p>
-            <a:pPr>
-              <a:spcBef>
-                <a:spcPts val="600"/>
-              </a:spcBef>
-              <a:defRPr sz="1500">
-                <a:solidFill>
-                  <a:srgbClr val="333333"/>
-                </a:solidFill>
-                <a:latin typeface="SimHei"/>
-              </a:defRPr>
-            </a:pPr>
-            <a:r>
-              <a:t>  VCS poll 正常运行但 recv_sync_timed 返回无数据</a:t>
-            </a:r>
-          </a:p>
-          <a:p>
-            <a:pPr>
-              <a:spcBef>
-                <a:spcPts val="600"/>
-              </a:spcBef>
-              <a:defRPr sz="1500">
-                <a:solidFill>
-                  <a:srgbClr val="333333"/>
-                </a:solidFill>
-                <a:latin typeface="SimHei"/>
-              </a:defRPr>
-            </a:pPr>
-          </a:p>
-          <a:p>
-            <a:pPr>
-              <a:spcBef>
-                <a:spcPts val="600"/>
-              </a:spcBef>
-              <a:defRPr sz="1500">
-                <a:solidFill>
-                  <a:srgbClr val="333333"/>
-                </a:solidFill>
-                <a:latin typeface="SimHei"/>
-              </a:defRPr>
-            </a:pPr>
-            <a:r>
-              <a:t>分析: bridge_dma_read_bytes 中的 recv_sync 循环</a:t>
-            </a:r>
-          </a:p>
-          <a:p>
-            <a:pPr>
-              <a:spcBef>
-                <a:spcPts val="600"/>
-              </a:spcBef>
-              <a:defRPr sz="1500">
-                <a:solidFill>
-                  <a:srgbClr val="333333"/>
-                </a:solidFill>
-                <a:latin typeface="SimHei"/>
-              </a:defRPr>
-            </a:pPr>
-            <a:r>
-              <a:t>  遇到 SYNC_MSG_TLP_READY 时: g_pending_tlp_ready++ 并 continue</a:t>
-            </a:r>
-          </a:p>
-          <a:p>
-            <a:pPr>
-              <a:spcBef>
-                <a:spcPts val="600"/>
-              </a:spcBef>
-              <a:defRPr sz="1500">
-                <a:solidFill>
-                  <a:srgbClr val="333333"/>
-                </a:solidFill>
-                <a:latin typeface="SimHei"/>
-              </a:defRPr>
-            </a:pPr>
-            <a:r>
-              <a:t>  但 TLP 数据仍在 data channel buffer 中未被读取</a:t>
-            </a:r>
-          </a:p>
-          <a:p>
-            <a:pPr>
-              <a:spcBef>
-                <a:spcPts val="600"/>
-              </a:spcBef>
-              <a:defRPr sz="1500">
-                <a:solidFill>
-                  <a:srgbClr val="333333"/>
-                </a:solidFill>
-                <a:latin typeface="SimHei"/>
-              </a:defRPr>
-            </a:pPr>
-            <a:r>
-              <a:t>  DMA 完成后 poll_tlp 调 recv_tlp — 读到错位的消息</a:t>
-            </a:r>
-          </a:p>
-          <a:p>
-            <a:pPr>
-              <a:spcBef>
-                <a:spcPts val="600"/>
-              </a:spcBef>
-              <a:defRPr sz="1500">
-                <a:solidFill>
-                  <a:srgbClr val="333333"/>
-                </a:solidFill>
-                <a:latin typeface="SimHei"/>
-              </a:defRPr>
-            </a:pPr>
-          </a:p>
-          <a:p>
-            <a:pPr>
-              <a:spcBef>
-                <a:spcPts val="600"/>
-              </a:spcBef>
-              <a:defRPr sz="1500">
-                <a:solidFill>
-                  <a:srgbClr val="333333"/>
-                </a:solidFill>
-                <a:latin typeface="SimHei"/>
-              </a:defRPr>
-            </a:pPr>
-            <a:r>
-              <a:t>死锁场景:</a:t>
-            </a:r>
-          </a:p>
-          <a:p>
-            <a:pPr>
-              <a:spcBef>
-                <a:spcPts val="600"/>
-              </a:spcBef>
-              <a:defRPr sz="1500">
-                <a:solidFill>
-                  <a:srgbClr val="333333"/>
-                </a:solidFill>
-                <a:latin typeface="SimHei"/>
-              </a:defRPr>
-            </a:pPr>
-            <a:r>
-              <a:t>  QEMU: send MRd → wait recv_sync(CPL_READY) ← 阻塞</a:t>
-            </a:r>
-          </a:p>
-          <a:p>
-            <a:pPr>
-              <a:spcBef>
-                <a:spcPts val="600"/>
-              </a:spcBef>
-              <a:defRPr sz="1500">
-                <a:solidFill>
-                  <a:srgbClr val="333333"/>
-                </a:solidFill>
-                <a:latin typeface="SimHei"/>
-              </a:defRPr>
-            </a:pPr>
-            <a:r>
-              <a:t>  VCS: DMA read 循环消费了 MRd 的 TLP_READY, 但未读 TLP 数据</a:t>
-            </a:r>
-          </a:p>
-          <a:p>
-            <a:pPr>
-              <a:spcBef>
-                <a:spcPts val="600"/>
-              </a:spcBef>
-              <a:defRPr sz="1500">
-                <a:solidFill>
-                  <a:srgbClr val="333333"/>
-                </a:solidFill>
-                <a:latin typeface="SimHei"/>
-              </a:defRPr>
-            </a:pPr>
-            <a:r>
-              <a:t>  VCS poll: pending_tlp 归零后 recv_tlp 与 data channel 错位</a:t>
+              <a:t>现象: DMA read 期间 QEMU 发的 TLP_READY 被 recv_sync 消费</a:t>
+            </a:r>
+          </a:p>
+          <a:p>
+            <a:pPr>
+              <a:spcBef>
+                <a:spcPts val="600"/>
+              </a:spcBef>
+              <a:defRPr sz="1500">
+                <a:solidFill>
+                  <a:srgbClr val="333333"/>
+                </a:solidFill>
+                <a:latin typeface="SimHei"/>
+              </a:defRPr>
+            </a:pPr>
+            <a:r>
+              <a:t>  pending 计数与 data channel 消息错位</a:t>
+            </a:r>
+          </a:p>
+          <a:p>
+            <a:pPr>
+              <a:spcBef>
+                <a:spcPts val="600"/>
+              </a:spcBef>
+              <a:defRPr sz="1500">
+                <a:solidFill>
+                  <a:srgbClr val="333333"/>
+                </a:solidFill>
+                <a:latin typeface="SimHei"/>
+              </a:defRPr>
+            </a:pPr>
+          </a:p>
+          <a:p>
+            <a:pPr>
+              <a:spcBef>
+                <a:spcPts val="600"/>
+              </a:spcBef>
+              <a:defRPr sz="1500">
+                <a:solidFill>
+                  <a:srgbClr val="333333"/>
+                </a:solidFill>
+                <a:latin typeface="SimHei"/>
+              </a:defRPr>
+            </a:pPr>
+            <a:r>
+              <a:t>修复: TLP ring buffer 缓存（1024 entry）</a:t>
+            </a:r>
+          </a:p>
+          <a:p>
+            <a:pPr>
+              <a:spcBef>
+                <a:spcPts val="600"/>
+              </a:spcBef>
+              <a:defRPr sz="1500">
+                <a:solidFill>
+                  <a:srgbClr val="333333"/>
+                </a:solidFill>
+                <a:latin typeface="SimHei"/>
+              </a:defRPr>
+            </a:pPr>
+            <a:r>
+              <a:t>  DMA read 遇到 TLP_READY 时立即 recv_tlp 并 push 到缓存</a:t>
+            </a:r>
+          </a:p>
+          <a:p>
+            <a:pPr>
+              <a:spcBef>
+                <a:spcPts val="600"/>
+              </a:spcBef>
+              <a:defRPr sz="1500">
+                <a:solidFill>
+                  <a:srgbClr val="333333"/>
+                </a:solidFill>
+                <a:latin typeface="SimHei"/>
+              </a:defRPr>
+            </a:pPr>
+            <a:r>
+              <a:t>  poll_tlp 优先从缓存 pop</a:t>
+            </a:r>
+          </a:p>
+          <a:p>
+            <a:pPr>
+              <a:spcBef>
+                <a:spcPts val="600"/>
+              </a:spcBef>
+              <a:defRPr sz="1500">
+                <a:solidFill>
+                  <a:srgbClr val="333333"/>
+                </a:solidFill>
+                <a:latin typeface="SimHei"/>
+              </a:defRPr>
+            </a:pPr>
+            <a:r>
+              <a:t>  自适应超时 1ms→5ms→50ms 适配跨机 TCP 延迟</a:t>
             </a:r>
           </a:p>
         </p:txBody>
@@ -6004,7 +7586,7 @@
               </a:defRPr>
             </a:pPr>
             <a:r>
-              <a:t>TCP Transport Channel 架构分析</a:t>
+              <a:t>问题 9: NOTIFY always_ff 冻结仿真</a:t>
             </a:r>
           </a:p>
         </p:txBody>
@@ -6043,225 +7625,100 @@
               </a:defRPr>
             </a:pPr>
             <a:r>
-              <a:t>当前 v2 三连接架构:</a:t>
-            </a:r>
-          </a:p>
-          <a:p>
-            <a:pPr>
-              <a:spcBef>
-                <a:spcPts val="600"/>
-              </a:spcBef>
-              <a:defRPr sz="1500">
-                <a:solidFill>
-                  <a:srgbClr val="333333"/>
-                </a:solidFill>
-                <a:latin typeface="SimHei"/>
-              </a:defRPr>
-            </a:pPr>
-            <a:r>
-              <a:t>  ctrl (port_base+0): sync_msg — TLP_READY, CPL_READY, DMA_CPL, SHUTDOWN</a:t>
-            </a:r>
-          </a:p>
-          <a:p>
-            <a:pPr>
-              <a:spcBef>
-                <a:spcPts val="600"/>
-              </a:spcBef>
-              <a:defRPr sz="1500">
-                <a:solidFill>
-                  <a:srgbClr val="333333"/>
-                </a:solidFill>
-                <a:latin typeface="SimHei"/>
-              </a:defRPr>
-            </a:pPr>
-            <a:r>
-              <a:t>  data (port_base+1): TLP, CPL 数据</a:t>
-            </a:r>
-          </a:p>
-          <a:p>
-            <a:pPr>
-              <a:spcBef>
-                <a:spcPts val="600"/>
-              </a:spcBef>
-              <a:defRPr sz="1500">
-                <a:solidFill>
-                  <a:srgbClr val="333333"/>
-                </a:solidFill>
-                <a:latin typeface="SimHei"/>
-              </a:defRPr>
-            </a:pPr>
-            <a:r>
-              <a:t>  aux  (port_base+2): DMA_REQ, DMA_CPL, MSI, ETH, DMA_DATA</a:t>
-            </a:r>
-          </a:p>
-          <a:p>
-            <a:pPr>
-              <a:spcBef>
-                <a:spcPts val="600"/>
-              </a:spcBef>
-              <a:defRPr sz="1500">
-                <a:solidFill>
-                  <a:srgbClr val="333333"/>
-                </a:solidFill>
-                <a:latin typeface="SimHei"/>
-              </a:defRPr>
-            </a:pPr>
-          </a:p>
-          <a:p>
-            <a:pPr>
-              <a:spcBef>
-                <a:spcPts val="600"/>
-              </a:spcBef>
-              <a:defRPr sz="1500">
-                <a:solidFill>
-                  <a:srgbClr val="333333"/>
-                </a:solidFill>
-                <a:latin typeface="SimHei"/>
-              </a:defRPr>
-            </a:pPr>
-            <a:r>
-              <a:t>问题: ctrl channel 是共享的</a:t>
-            </a:r>
-          </a:p>
-          <a:p>
-            <a:pPr>
-              <a:spcBef>
-                <a:spcPts val="600"/>
-              </a:spcBef>
-              <a:defRPr sz="1500">
-                <a:solidFill>
-                  <a:srgbClr val="333333"/>
-                </a:solidFill>
-                <a:latin typeface="SimHei"/>
-              </a:defRPr>
-            </a:pPr>
-            <a:r>
-              <a:t>  TLP_READY 和 DMA_CPL 都走 ctrl channel</a:t>
-            </a:r>
-          </a:p>
-          <a:p>
-            <a:pPr>
-              <a:spcBef>
-                <a:spcPts val="600"/>
-              </a:spcBef>
-              <a:defRPr sz="1500">
-                <a:solidFill>
-                  <a:srgbClr val="333333"/>
-                </a:solidFill>
-                <a:latin typeface="SimHei"/>
-              </a:defRPr>
-            </a:pPr>
-            <a:r>
-              <a:t>  DMA read 循环 recv_sync 消费本属于 poll 的 TLP_READY</a:t>
-            </a:r>
-          </a:p>
-          <a:p>
-            <a:pPr>
-              <a:spcBef>
-                <a:spcPts val="600"/>
-              </a:spcBef>
-              <a:defRPr sz="1500">
-                <a:solidFill>
-                  <a:srgbClr val="333333"/>
-                </a:solidFill>
-                <a:latin typeface="SimHei"/>
-              </a:defRPr>
-            </a:pPr>
-            <a:r>
-              <a:t>  消费后只计数 (pending_tlp++), 不读 data channel 上的 TLP 数据</a:t>
-            </a:r>
-          </a:p>
-          <a:p>
-            <a:pPr>
-              <a:spcBef>
-                <a:spcPts val="600"/>
-              </a:spcBef>
-              <a:defRPr sz="1500">
-                <a:solidFill>
-                  <a:srgbClr val="333333"/>
-                </a:solidFill>
-                <a:latin typeface="SimHei"/>
-              </a:defRPr>
-            </a:pPr>
-            <a:r>
-              <a:t>  后续 recv_tlp 与 data channel 上的消息错位</a:t>
-            </a:r>
-          </a:p>
-          <a:p>
-            <a:pPr>
-              <a:spcBef>
-                <a:spcPts val="600"/>
-              </a:spcBef>
-              <a:defRPr sz="1500">
-                <a:solidFill>
-                  <a:srgbClr val="333333"/>
-                </a:solidFill>
-                <a:latin typeface="SimHei"/>
-              </a:defRPr>
-            </a:pPr>
-          </a:p>
-          <a:p>
-            <a:pPr>
-              <a:spcBef>
-                <a:spcPts val="600"/>
-              </a:spcBef>
-              <a:defRPr sz="1500">
-                <a:solidFill>
-                  <a:srgbClr val="333333"/>
-                </a:solidFill>
-                <a:latin typeface="SimHei"/>
-              </a:defRPr>
-            </a:pPr>
-            <a:r>
-              <a:t>解决方案 (选项):</a:t>
-            </a:r>
-          </a:p>
-          <a:p>
-            <a:pPr>
-              <a:spcBef>
-                <a:spcPts val="600"/>
-              </a:spcBef>
-              <a:defRPr sz="1500">
-                <a:solidFill>
-                  <a:srgbClr val="333333"/>
-                </a:solidFill>
-                <a:latin typeface="SimHei"/>
-              </a:defRPr>
-            </a:pPr>
-            <a:r>
-              <a:t>  A: DMA read 消费 TLP_READY 时同步 recv_tlp 缓存完整 TLP</a:t>
-            </a:r>
-          </a:p>
-          <a:p>
-            <a:pPr>
-              <a:spcBef>
-                <a:spcPts val="600"/>
-              </a:spcBef>
-              <a:defRPr sz="1500">
-                <a:solidFill>
-                  <a:srgbClr val="333333"/>
-                </a:solidFill>
-                <a:latin typeface="SimHei"/>
-              </a:defRPr>
-            </a:pPr>
-            <a:r>
-              <a:t>  B: 将 TLP_READY 和 DMA_CPL 拆分到不同 channel</a:t>
-            </a:r>
-          </a:p>
-          <a:p>
-            <a:pPr>
-              <a:spcBef>
-                <a:spcPts val="600"/>
-              </a:spcBef>
-              <a:defRPr sz="1500">
-                <a:solidFill>
-                  <a:srgbClr val="333333"/>
-                </a:solidFill>
-                <a:latin typeface="SimHei"/>
-              </a:defRPr>
-            </a:pPr>
-            <a:r>
-              <a:t>  C: 消息自描述 — data channel 每条消息带 type header</a:t>
+              <a:t>现象: handle_vio_notify 在 always_ff 中调阻塞 DPI-C</a:t>
+            </a:r>
+          </a:p>
+          <a:p>
+            <a:pPr>
+              <a:spcBef>
+                <a:spcPts val="600"/>
+              </a:spcBef>
+              <a:defRPr sz="1500">
+                <a:solidFill>
+                  <a:srgbClr val="333333"/>
+                </a:solidFill>
+                <a:latin typeface="SimHei"/>
+              </a:defRPr>
+            </a:pPr>
+            <a:r>
+              <a:t>  bridge_dma_read_bytes recv_sync 阻塞 → 整个仿真冻结</a:t>
+            </a:r>
+          </a:p>
+          <a:p>
+            <a:pPr>
+              <a:spcBef>
+                <a:spcPts val="600"/>
+              </a:spcBef>
+              <a:defRPr sz="1500">
+                <a:solidFill>
+                  <a:srgbClr val="333333"/>
+                </a:solidFill>
+                <a:latin typeface="SimHei"/>
+              </a:defRPr>
+            </a:pPr>
+            <a:r>
+              <a:t>  TLP 缓存溢出 (cache full)</a:t>
+            </a:r>
+          </a:p>
+          <a:p>
+            <a:pPr>
+              <a:spcBef>
+                <a:spcPts val="600"/>
+              </a:spcBef>
+              <a:defRPr sz="1500">
+                <a:solidFill>
+                  <a:srgbClr val="333333"/>
+                </a:solidFill>
+                <a:latin typeface="SimHei"/>
+              </a:defRPr>
+            </a:pPr>
+          </a:p>
+          <a:p>
+            <a:pPr>
+              <a:spcBef>
+                <a:spcPts val="600"/>
+              </a:spcBef>
+              <a:defRPr sz="1500">
+                <a:solidFill>
+                  <a:srgbClr val="333333"/>
+                </a:solidFill>
+                <a:latin typeface="SimHei"/>
+              </a:defRPr>
+            </a:pPr>
+            <a:r>
+              <a:t>修复: NOTIFY 处理从 always_ff 移到 initial 块</a:t>
+            </a:r>
+          </a:p>
+          <a:p>
+            <a:pPr>
+              <a:spcBef>
+                <a:spcPts val="600"/>
+              </a:spcBef>
+              <a:defRPr sz="1500">
+                <a:solidFill>
+                  <a:srgbClr val="333333"/>
+                </a:solidFill>
+                <a:latin typeface="SimHei"/>
+              </a:defRPr>
+            </a:pPr>
+            <a:r>
+              <a:t>  always_ff 只做边沿检测并触发 SV event（非阻塞）</a:t>
+            </a:r>
+          </a:p>
+          <a:p>
+            <a:pPr>
+              <a:spcBef>
+                <a:spcPts val="600"/>
+              </a:spcBef>
+              <a:defRPr sz="1500">
+                <a:solidFill>
+                  <a:srgbClr val="333333"/>
+                </a:solidFill>
+                <a:latin typeface="SimHei"/>
+              </a:defRPr>
+            </a:pPr>
+            <a:r>
+              <a:t>  initial 块等待 event 后调 handle_vio_notify（可安全阻塞）</a:t>
             </a:r>
           </a:p>
         </p:txBody>
@@ -6306,7 +7763,7 @@
           </a:bodyPr>
           <a:lstStyle/>
           <a:p>
-            <a:pPr>
+            <a:pPr algn="l">
               <a:defRPr sz="2400" b="1">
                 <a:solidFill>
                   <a:srgbClr val="002B5C"/>
@@ -6315,854 +7772,143 @@
               </a:defRPr>
             </a:pPr>
             <a:r>
-              <a:t>跨机测试验证结果 (53 ↔ 61)</a:t>
-            </a:r>
-          </a:p>
-        </p:txBody>
-      </p:sp>
-      <p:graphicFrame>
-        <p:nvGraphicFramePr>
-          <p:cNvPr id="3" name="Table 2"/>
-          <p:cNvGraphicFramePr>
-            <a:graphicFrameLocks noGrp="1"/>
-          </p:cNvGraphicFramePr>
+              <a:t>问题 10: _nb 函数 aux channel 协议错位</a:t>
+            </a:r>
+          </a:p>
+        </p:txBody>
+      </p:sp>
+      <p:sp>
+        <p:nvSpPr>
+          <p:cNvPr id="3" name="TextBox 2"/>
+          <p:cNvSpPr txBox="1"/>
           <p:nvPr/>
-        </p:nvGraphicFramePr>
-        <p:xfrm>
-          <a:off x="365760" y="1097280"/>
-          <a:ext cx="8412480" cy="4389120"/>
-        </p:xfrm>
-        <a:graphic>
-          <a:graphicData uri="http://schemas.openxmlformats.org/drawingml/2006/table">
-            <a:tbl>
-              <a:tblPr firstRow="1" bandRow="1">
-                <a:tableStyleId>{5C22544A-7EE6-4342-B048-85BDC9FD1C3A}</a:tableStyleId>
-              </a:tblPr>
-              <a:tblGrid>
-                <a:gridCol w="2804160"/>
-                <a:gridCol w="2804160"/>
-                <a:gridCol w="2804160"/>
-              </a:tblGrid>
-              <a:tr h="365760">
-                <a:tc>
-                  <a:txBody>
-                    <a:bodyPr/>
-                    <a:lstStyle/>
-                    <a:p>
-                      <a:pPr algn="ctr">
-                        <a:defRPr sz="1300" b="1">
-                          <a:solidFill>
-                            <a:srgbClr val="FFFFFF"/>
-                          </a:solidFill>
-                          <a:latin typeface="SimHei"/>
-                        </a:defRPr>
-                      </a:pPr>
-                      <a:r>
-                        <a:t>测试项</a:t>
-                      </a:r>
-                    </a:p>
-                  </a:txBody>
-                  <a:tcPr>
-                    <a:solidFill>
-                      <a:srgbClr val="003D7A"/>
-                    </a:solidFill>
-                  </a:tcPr>
-                </a:tc>
-                <a:tc>
-                  <a:txBody>
-                    <a:bodyPr/>
-                    <a:lstStyle/>
-                    <a:p>
-                      <a:pPr algn="ctr">
-                        <a:defRPr sz="1300" b="1">
-                          <a:solidFill>
-                            <a:srgbClr val="FFFFFF"/>
-                          </a:solidFill>
-                          <a:latin typeface="SimHei"/>
-                        </a:defRPr>
-                      </a:pPr>
-                      <a:r>
-                        <a:t>结果</a:t>
-                      </a:r>
-                    </a:p>
-                  </a:txBody>
-                  <a:tcPr>
-                    <a:solidFill>
-                      <a:srgbClr val="003D7A"/>
-                    </a:solidFill>
-                  </a:tcPr>
-                </a:tc>
-                <a:tc>
-                  <a:txBody>
-                    <a:bodyPr/>
-                    <a:lstStyle/>
-                    <a:p>
-                      <a:pPr algn="ctr">
-                        <a:defRPr sz="1300" b="1">
-                          <a:solidFill>
-                            <a:srgbClr val="FFFFFF"/>
-                          </a:solidFill>
-                          <a:latin typeface="SimHei"/>
-                        </a:defRPr>
-                      </a:pPr>
-                      <a:r>
-                        <a:t>说明</a:t>
-                      </a:r>
-                    </a:p>
-                  </a:txBody>
-                  <a:tcPr>
-                    <a:solidFill>
-                      <a:srgbClr val="003D7A"/>
-                    </a:solidFill>
-                  </a:tcPr>
-                </a:tc>
-              </a:tr>
-              <a:tr h="365760">
-                <a:tc>
-                  <a:txBody>
-                    <a:bodyPr/>
-                    <a:lstStyle/>
-                    <a:p>
-                      <a:pPr algn="l">
-                        <a:defRPr sz="1200">
-                          <a:solidFill>
-                            <a:srgbClr val="000000"/>
-                          </a:solidFill>
-                          <a:latin typeface="SimHei"/>
-                        </a:defRPr>
-                      </a:pPr>
-                      <a:r>
-                        <a:t>QEMU TCP listen (53)</a:t>
-                      </a:r>
-                    </a:p>
-                  </a:txBody>
-                  <a:tcPr/>
-                </a:tc>
-                <a:tc>
-                  <a:txBody>
-                    <a:bodyPr/>
-                    <a:lstStyle/>
-                    <a:p>
-                      <a:pPr algn="l">
-                        <a:defRPr sz="1200">
-                          <a:solidFill>
-                            <a:srgbClr val="000000"/>
-                          </a:solidFill>
-                          <a:latin typeface="SimHei"/>
-                        </a:defRPr>
-                      </a:pPr>
-                      <a:r>
-                        <a:t>✅ 通过</a:t>
-                      </a:r>
-                    </a:p>
-                  </a:txBody>
-                  <a:tcPr/>
-                </a:tc>
-                <a:tc>
-                  <a:txBody>
-                    <a:bodyPr/>
-                    <a:lstStyle/>
-                    <a:p>
-                      <a:pPr algn="l">
-                        <a:defRPr sz="1200">
-                          <a:solidFill>
-                            <a:srgbClr val="000000"/>
-                          </a:solidFill>
-                          <a:latin typeface="SimHei"/>
-                        </a:defRPr>
-                      </a:pPr>
-                      <a:r>
-                        <a:t>端口 9100 监听成功</a:t>
-                      </a:r>
-                    </a:p>
-                  </a:txBody>
-                  <a:tcPr/>
-                </a:tc>
-              </a:tr>
-              <a:tr h="365760">
-                <a:tc>
-                  <a:txBody>
-                    <a:bodyPr/>
-                    <a:lstStyle/>
-                    <a:p>
-                      <a:pPr algn="l">
-                        <a:defRPr sz="1200">
-                          <a:solidFill>
-                            <a:srgbClr val="000000"/>
-                          </a:solidFill>
-                          <a:latin typeface="SimHei"/>
-                        </a:defRPr>
-                      </a:pPr>
-                      <a:r>
-                        <a:t>VCS TCP connect (61)</a:t>
-                      </a:r>
-                    </a:p>
-                  </a:txBody>
-                  <a:tcPr>
-                    <a:solidFill>
-                      <a:srgbClr val="E8F0FA"/>
-                    </a:solidFill>
-                  </a:tcPr>
-                </a:tc>
-                <a:tc>
-                  <a:txBody>
-                    <a:bodyPr/>
-                    <a:lstStyle/>
-                    <a:p>
-                      <a:pPr algn="l">
-                        <a:defRPr sz="1200">
-                          <a:solidFill>
-                            <a:srgbClr val="000000"/>
-                          </a:solidFill>
-                          <a:latin typeface="SimHei"/>
-                        </a:defRPr>
-                      </a:pPr>
-                      <a:r>
-                        <a:t>✅ 通过</a:t>
-                      </a:r>
-                    </a:p>
-                  </a:txBody>
-                  <a:tcPr>
-                    <a:solidFill>
-                      <a:srgbClr val="E8F0FA"/>
-                    </a:solidFill>
-                  </a:tcPr>
-                </a:tc>
-                <a:tc>
-                  <a:txBody>
-                    <a:bodyPr/>
-                    <a:lstStyle/>
-                    <a:p>
-                      <a:pPr algn="l">
-                        <a:defRPr sz="1200">
-                          <a:solidFill>
-                            <a:srgbClr val="000000"/>
-                          </a:solidFill>
-                          <a:latin typeface="SimHei"/>
-                        </a:defRPr>
-                      </a:pPr>
-                      <a:r>
-                        <a:t>连接 QEMU 成功</a:t>
-                      </a:r>
-                    </a:p>
-                  </a:txBody>
-                  <a:tcPr>
-                    <a:solidFill>
-                      <a:srgbClr val="E8F0FA"/>
-                    </a:solidFill>
-                  </a:tcPr>
-                </a:tc>
-              </a:tr>
-              <a:tr h="365760">
-                <a:tc>
-                  <a:txBody>
-                    <a:bodyPr/>
-                    <a:lstStyle/>
-                    <a:p>
-                      <a:pPr algn="l">
-                        <a:defRPr sz="1200">
-                          <a:solidFill>
-                            <a:srgbClr val="000000"/>
-                          </a:solidFill>
-                          <a:latin typeface="SimHei"/>
-                        </a:defRPr>
-                      </a:pPr>
-                      <a:r>
-                        <a:t>ETH SHM 创建</a:t>
-                      </a:r>
-                    </a:p>
-                  </a:txBody>
-                  <a:tcPr/>
-                </a:tc>
-                <a:tc>
-                  <a:txBody>
-                    <a:bodyPr/>
-                    <a:lstStyle/>
-                    <a:p>
-                      <a:pPr algn="l">
-                        <a:defRPr sz="1200">
-                          <a:solidFill>
-                            <a:srgbClr val="000000"/>
-                          </a:solidFill>
-                          <a:latin typeface="SimHei"/>
-                        </a:defRPr>
-                      </a:pPr>
-                      <a:r>
-                        <a:t>✅ 通过</a:t>
-                      </a:r>
-                    </a:p>
-                  </a:txBody>
-                  <a:tcPr/>
-                </a:tc>
-                <a:tc>
-                  <a:txBody>
-                    <a:bodyPr/>
-                    <a:lstStyle/>
-                    <a:p>
-                      <a:pPr algn="l">
-                        <a:defRPr sz="1200">
-                          <a:solidFill>
-                            <a:srgbClr val="000000"/>
-                          </a:solidFill>
-                          <a:latin typeface="SimHei"/>
-                        </a:defRPr>
-                      </a:pPr>
-                      <a:r>
-                        <a:t>VCS 创建 /cosim_eth0</a:t>
-                      </a:r>
-                    </a:p>
-                  </a:txBody>
-                  <a:tcPr/>
-                </a:tc>
-              </a:tr>
-              <a:tr h="365760">
-                <a:tc>
-                  <a:txBody>
-                    <a:bodyPr/>
-                    <a:lstStyle/>
-                    <a:p>
-                      <a:pPr algn="l">
-                        <a:defRPr sz="1200">
-                          <a:solidFill>
-                            <a:srgbClr val="000000"/>
-                          </a:solidFill>
-                          <a:latin typeface="SimHei"/>
-                        </a:defRPr>
-                      </a:pPr>
-                      <a:r>
-                        <a:t>TAP bridge</a:t>
-                      </a:r>
-                    </a:p>
-                  </a:txBody>
-                  <a:tcPr>
-                    <a:solidFill>
-                      <a:srgbClr val="E8F0FA"/>
-                    </a:solidFill>
-                  </a:tcPr>
-                </a:tc>
-                <a:tc>
-                  <a:txBody>
-                    <a:bodyPr/>
-                    <a:lstStyle/>
-                    <a:p>
-                      <a:pPr algn="l">
-                        <a:defRPr sz="1200">
-                          <a:solidFill>
-                            <a:srgbClr val="000000"/>
-                          </a:solidFill>
-                          <a:latin typeface="SimHei"/>
-                        </a:defRPr>
-                      </a:pPr>
-                      <a:r>
-                        <a:t>✅ 通过</a:t>
-                      </a:r>
-                    </a:p>
-                  </a:txBody>
-                  <a:tcPr>
-                    <a:solidFill>
-                      <a:srgbClr val="E8F0FA"/>
-                    </a:solidFill>
-                  </a:tcPr>
-                </a:tc>
-                <a:tc>
-                  <a:txBody>
-                    <a:bodyPr/>
-                    <a:lstStyle/>
-                    <a:p>
-                      <a:pPr algn="l">
-                        <a:defRPr sz="1200">
-                          <a:solidFill>
-                            <a:srgbClr val="000000"/>
-                          </a:solidFill>
-                          <a:latin typeface="SimHei"/>
-                        </a:defRPr>
-                      </a:pPr>
-                      <a:r>
-                        <a:t>cosim0 IP 10.0.0.1/24</a:t>
-                      </a:r>
-                    </a:p>
-                  </a:txBody>
-                  <a:tcPr>
-                    <a:solidFill>
-                      <a:srgbClr val="E8F0FA"/>
-                    </a:solidFill>
-                  </a:tcPr>
-                </a:tc>
-              </a:tr>
-              <a:tr h="365760">
-                <a:tc>
-                  <a:txBody>
-                    <a:bodyPr/>
-                    <a:lstStyle/>
-                    <a:p>
-                      <a:pPr algn="l">
-                        <a:defRPr sz="1200">
-                          <a:solidFill>
-                            <a:srgbClr val="000000"/>
-                          </a:solidFill>
-                          <a:latin typeface="SimHei"/>
-                        </a:defRPr>
-                      </a:pPr>
-                      <a:r>
-                        <a:t>Guest boot</a:t>
-                      </a:r>
-                    </a:p>
-                  </a:txBody>
-                  <a:tcPr/>
-                </a:tc>
-                <a:tc>
-                  <a:txBody>
-                    <a:bodyPr/>
-                    <a:lstStyle/>
-                    <a:p>
-                      <a:pPr algn="l">
-                        <a:defRPr sz="1200">
-                          <a:solidFill>
-                            <a:srgbClr val="000000"/>
-                          </a:solidFill>
-                          <a:latin typeface="SimHei"/>
-                        </a:defRPr>
-                      </a:pPr>
-                      <a:r>
-                        <a:t>✅ 通过</a:t>
-                      </a:r>
-                    </a:p>
-                  </a:txBody>
-                  <a:tcPr/>
-                </a:tc>
-                <a:tc>
-                  <a:txBody>
-                    <a:bodyPr/>
-                    <a:lstStyle/>
-                    <a:p>
-                      <a:pPr algn="l">
-                        <a:defRPr sz="1200">
-                          <a:solidFill>
-                            <a:srgbClr val="000000"/>
-                          </a:solidFill>
-                          <a:latin typeface="SimHei"/>
-                        </a:defRPr>
-                      </a:pPr>
-                      <a:r>
-                        <a:t>buildroot 登录成功</a:t>
-                      </a:r>
-                    </a:p>
-                  </a:txBody>
-                  <a:tcPr/>
-                </a:tc>
-              </a:tr>
-              <a:tr h="365760">
-                <a:tc>
-                  <a:txBody>
-                    <a:bodyPr/>
-                    <a:lstStyle/>
-                    <a:p>
-                      <a:pPr algn="l">
-                        <a:defRPr sz="1200">
-                          <a:solidFill>
-                            <a:srgbClr val="000000"/>
-                          </a:solidFill>
-                          <a:latin typeface="SimHei"/>
-                        </a:defRPr>
-                      </a:pPr>
-                      <a:r>
-                        <a:t>Guest eth0 配置</a:t>
-                      </a:r>
-                    </a:p>
-                  </a:txBody>
-                  <a:tcPr>
-                    <a:solidFill>
-                      <a:srgbClr val="E8F0FA"/>
-                    </a:solidFill>
-                  </a:tcPr>
-                </a:tc>
-                <a:tc>
-                  <a:txBody>
-                    <a:bodyPr/>
-                    <a:lstStyle/>
-                    <a:p>
-                      <a:pPr algn="l">
-                        <a:defRPr sz="1200">
-                          <a:solidFill>
-                            <a:srgbClr val="000000"/>
-                          </a:solidFill>
-                          <a:latin typeface="SimHei"/>
-                        </a:defRPr>
-                      </a:pPr>
-                      <a:r>
-                        <a:t>✅ 通过</a:t>
-                      </a:r>
-                    </a:p>
-                  </a:txBody>
-                  <a:tcPr>
-                    <a:solidFill>
-                      <a:srgbClr val="E8F0FA"/>
-                    </a:solidFill>
-                  </a:tcPr>
-                </a:tc>
-                <a:tc>
-                  <a:txBody>
-                    <a:bodyPr/>
-                    <a:lstStyle/>
-                    <a:p>
-                      <a:pPr algn="l">
-                        <a:defRPr sz="1200">
-                          <a:solidFill>
-                            <a:srgbClr val="000000"/>
-                          </a:solidFill>
-                          <a:latin typeface="SimHei"/>
-                        </a:defRPr>
-                      </a:pPr>
-                      <a:r>
-                        <a:t>10.0.0.2/24, virtio_net</a:t>
-                      </a:r>
-                    </a:p>
-                  </a:txBody>
-                  <a:tcPr>
-                    <a:solidFill>
-                      <a:srgbClr val="E8F0FA"/>
-                    </a:solidFill>
-                  </a:tcPr>
-                </a:tc>
-              </a:tr>
-              <a:tr h="365760">
-                <a:tc>
-                  <a:txBody>
-                    <a:bodyPr/>
-                    <a:lstStyle/>
-                    <a:p>
-                      <a:pPr algn="l">
-                        <a:defRPr sz="1200">
-                          <a:solidFill>
-                            <a:srgbClr val="000000"/>
-                          </a:solidFill>
-                          <a:latin typeface="SimHei"/>
-                        </a:defRPr>
-                      </a:pPr>
-                      <a:r>
-                        <a:t>PCIe TLP 交换</a:t>
-                      </a:r>
-                    </a:p>
-                  </a:txBody>
-                  <a:tcPr/>
-                </a:tc>
-                <a:tc>
-                  <a:txBody>
-                    <a:bodyPr/>
-                    <a:lstStyle/>
-                    <a:p>
-                      <a:pPr algn="l">
-                        <a:defRPr sz="1200">
-                          <a:solidFill>
-                            <a:srgbClr val="000000"/>
-                          </a:solidFill>
-                          <a:latin typeface="SimHei"/>
-                        </a:defRPr>
-                      </a:pPr>
-                      <a:r>
-                        <a:t>✅ 通过</a:t>
-                      </a:r>
-                    </a:p>
-                  </a:txBody>
-                  <a:tcPr/>
-                </a:tc>
-                <a:tc>
-                  <a:txBody>
-                    <a:bodyPr/>
-                    <a:lstStyle/>
-                    <a:p>
-                      <a:pPr algn="l">
-                        <a:defRPr sz="1200">
-                          <a:solidFill>
-                            <a:srgbClr val="000000"/>
-                          </a:solidFill>
-                          <a:latin typeface="SimHei"/>
-                        </a:defRPr>
-                      </a:pPr>
-                      <a:r>
-                        <a:t>278 个 TLP</a:t>
-                      </a:r>
-                    </a:p>
-                  </a:txBody>
-                  <a:tcPr/>
-                </a:tc>
-              </a:tr>
-              <a:tr h="365760">
-                <a:tc>
-                  <a:txBody>
-                    <a:bodyPr/>
-                    <a:lstStyle/>
-                    <a:p>
-                      <a:pPr algn="l">
-                        <a:defRPr sz="1200">
-                          <a:solidFill>
-                            <a:srgbClr val="000000"/>
-                          </a:solidFill>
-                          <a:latin typeface="SimHei"/>
-                        </a:defRPr>
-                      </a:pPr>
-                      <a:r>
-                        <a:t>DMA (config)</a:t>
-                      </a:r>
-                    </a:p>
-                  </a:txBody>
-                  <a:tcPr>
-                    <a:solidFill>
-                      <a:srgbClr val="E8F0FA"/>
-                    </a:solidFill>
-                  </a:tcPr>
-                </a:tc>
-                <a:tc>
-                  <a:txBody>
-                    <a:bodyPr/>
-                    <a:lstStyle/>
-                    <a:p>
-                      <a:pPr algn="l">
-                        <a:defRPr sz="1200">
-                          <a:solidFill>
-                            <a:srgbClr val="000000"/>
-                          </a:solidFill>
-                          <a:latin typeface="SimHei"/>
-                        </a:defRPr>
-                      </a:pPr>
-                      <a:r>
-                        <a:t>✅ 通过</a:t>
-                      </a:r>
-                    </a:p>
-                  </a:txBody>
-                  <a:tcPr>
-                    <a:solidFill>
-                      <a:srgbClr val="E8F0FA"/>
-                    </a:solidFill>
-                  </a:tcPr>
-                </a:tc>
-                <a:tc>
-                  <a:txBody>
-                    <a:bodyPr/>
-                    <a:lstStyle/>
-                    <a:p>
-                      <a:pPr algn="l">
-                        <a:defRPr sz="1200">
-                          <a:solidFill>
-                            <a:srgbClr val="000000"/>
-                          </a:solidFill>
-                          <a:latin typeface="SimHei"/>
-                        </a:defRPr>
-                      </a:pPr>
-                      <a:r>
-                        <a:t>4 次 DMA read</a:t>
-                      </a:r>
-                    </a:p>
-                  </a:txBody>
-                  <a:tcPr>
-                    <a:solidFill>
-                      <a:srgbClr val="E8F0FA"/>
-                    </a:solidFill>
-                  </a:tcPr>
-                </a:tc>
-              </a:tr>
-              <a:tr h="365760">
-                <a:tc>
-                  <a:txBody>
-                    <a:bodyPr/>
-                    <a:lstStyle/>
-                    <a:p>
-                      <a:pPr algn="l">
-                        <a:defRPr sz="1200">
-                          <a:solidFill>
-                            <a:srgbClr val="000000"/>
-                          </a:solidFill>
-                          <a:latin typeface="SimHei"/>
-                        </a:defRPr>
-                      </a:pPr>
-                      <a:r>
-                        <a:t>VQ-TX (MLD)</a:t>
-                      </a:r>
-                    </a:p>
-                  </a:txBody>
-                  <a:tcPr/>
-                </a:tc>
-                <a:tc>
-                  <a:txBody>
-                    <a:bodyPr/>
-                    <a:lstStyle/>
-                    <a:p>
-                      <a:pPr algn="l">
-                        <a:defRPr sz="1200">
-                          <a:solidFill>
-                            <a:srgbClr val="000000"/>
-                          </a:solidFill>
-                          <a:latin typeface="SimHei"/>
-                        </a:defRPr>
-                      </a:pPr>
-                      <a:r>
-                        <a:t>✅ 通过</a:t>
-                      </a:r>
-                    </a:p>
-                  </a:txBody>
-                  <a:tcPr/>
-                </a:tc>
-                <a:tc>
-                  <a:txBody>
-                    <a:bodyPr/>
-                    <a:lstStyle/>
-                    <a:p>
-                      <a:pPr algn="l">
-                        <a:defRPr sz="1200">
-                          <a:solidFill>
-                            <a:srgbClr val="000000"/>
-                          </a:solidFill>
-                          <a:latin typeface="SimHei"/>
-                        </a:defRPr>
-                      </a:pPr>
-                      <a:r>
-                        <a:t>1 包 90B → TAP</a:t>
-                      </a:r>
-                    </a:p>
-                  </a:txBody>
-                  <a:tcPr/>
-                </a:tc>
-              </a:tr>
-              <a:tr h="365760">
-                <a:tc>
-                  <a:txBody>
-                    <a:bodyPr/>
-                    <a:lstStyle/>
-                    <a:p>
-                      <a:pPr algn="l">
-                        <a:defRPr sz="1200">
-                          <a:solidFill>
-                            <a:srgbClr val="000000"/>
-                          </a:solidFill>
-                          <a:latin typeface="SimHei"/>
-                        </a:defRPr>
-                      </a:pPr>
-                      <a:r>
-                        <a:t>virtio MSI</a:t>
-                      </a:r>
-                    </a:p>
-                  </a:txBody>
-                  <a:tcPr>
-                    <a:solidFill>
-                      <a:srgbClr val="E8F0FA"/>
-                    </a:solidFill>
-                  </a:tcPr>
-                </a:tc>
-                <a:tc>
-                  <a:txBody>
-                    <a:bodyPr/>
-                    <a:lstStyle/>
-                    <a:p>
-                      <a:pPr algn="l">
-                        <a:defRPr sz="1200">
-                          <a:solidFill>
-                            <a:srgbClr val="000000"/>
-                          </a:solidFill>
-                          <a:latin typeface="SimHei"/>
-                        </a:defRPr>
-                      </a:pPr>
-                      <a:r>
-                        <a:t>❌ 未触发</a:t>
-                      </a:r>
-                    </a:p>
-                  </a:txBody>
-                  <a:tcPr>
-                    <a:solidFill>
-                      <a:srgbClr val="E8F0FA"/>
-                    </a:solidFill>
-                  </a:tcPr>
-                </a:tc>
-                <a:tc>
-                  <a:txBody>
-                    <a:bodyPr/>
-                    <a:lstStyle/>
-                    <a:p>
-                      <a:pPr algn="l">
-                        <a:defRPr sz="1200">
-                          <a:solidFill>
-                            <a:srgbClr val="000000"/>
-                          </a:solidFill>
-                          <a:latin typeface="SimHei"/>
-                        </a:defRPr>
-                      </a:pPr>
-                      <a:r>
-                        <a:t>已修复, 待验证</a:t>
-                      </a:r>
-                    </a:p>
-                  </a:txBody>
-                  <a:tcPr>
-                    <a:solidFill>
-                      <a:srgbClr val="E8F0FA"/>
-                    </a:solidFill>
-                  </a:tcPr>
-                </a:tc>
-              </a:tr>
-              <a:tr h="365760">
-                <a:tc>
-                  <a:txBody>
-                    <a:bodyPr/>
-                    <a:lstStyle/>
-                    <a:p>
-                      <a:pPr algn="l">
-                        <a:defRPr sz="1200">
-                          <a:solidFill>
-                            <a:srgbClr val="000000"/>
-                          </a:solidFill>
-                          <a:latin typeface="SimHei"/>
-                        </a:defRPr>
-                      </a:pPr>
-                      <a:r>
-                        <a:t>Guest ping</a:t>
-                      </a:r>
-                    </a:p>
-                  </a:txBody>
-                  <a:tcPr/>
-                </a:tc>
-                <a:tc>
-                  <a:txBody>
-                    <a:bodyPr/>
-                    <a:lstStyle/>
-                    <a:p>
-                      <a:pPr algn="l">
-                        <a:defRPr sz="1200">
-                          <a:solidFill>
-                            <a:srgbClr val="000000"/>
-                          </a:solidFill>
-                          <a:latin typeface="SimHei"/>
-                        </a:defRPr>
-                      </a:pPr>
-                      <a:r>
-                        <a:t>❌ 100% loss</a:t>
-                      </a:r>
-                    </a:p>
-                  </a:txBody>
-                  <a:tcPr/>
-                </a:tc>
-                <a:tc>
-                  <a:txBody>
-                    <a:bodyPr/>
-                    <a:lstStyle/>
-                    <a:p>
-                      <a:pPr algn="l">
-                        <a:defRPr sz="1200">
-                          <a:solidFill>
-                            <a:srgbClr val="000000"/>
-                          </a:solidFill>
-                          <a:latin typeface="SimHei"/>
-                        </a:defRPr>
-                      </a:pPr>
-                      <a:r>
-                        <a:t>TCP 消息交错</a:t>
-                      </a:r>
-                    </a:p>
-                  </a:txBody>
-                  <a:tcPr/>
-                </a:tc>
-              </a:tr>
-            </a:tbl>
-          </a:graphicData>
-        </a:graphic>
-      </p:graphicFrame>
+        </p:nvSpPr>
+        <p:spPr>
+          <a:xfrm>
+            <a:off x="457200" y="1005840"/>
+            <a:ext cx="8229600" cy="5486400"/>
+          </a:xfrm>
+          <a:prstGeom prst="rect">
+            <a:avLst/>
+          </a:prstGeom>
+          <a:noFill/>
+        </p:spPr>
+        <p:txBody>
+          <a:bodyPr wrap="square">
+            <a:spAutoFit/>
+          </a:bodyPr>
+          <a:lstStyle/>
+          <a:p>
+            <a:pPr>
+              <a:spcBef>
+                <a:spcPts val="600"/>
+              </a:spcBef>
+              <a:defRPr sz="1500">
+                <a:solidFill>
+                  <a:srgbClr val="333333"/>
+                </a:solidFill>
+                <a:latin typeface="SimHei"/>
+              </a:defRPr>
+            </a:pPr>
+            <a:r>
+              <a:t>现象: recv_dma_req_nb 读 header 发现非 DMA_REQ 返回 -1</a:t>
+            </a:r>
+          </a:p>
+          <a:p>
+            <a:pPr>
+              <a:spcBef>
+                <a:spcPts val="600"/>
+              </a:spcBef>
+              <a:defRPr sz="1500">
+                <a:solidFill>
+                  <a:srgbClr val="333333"/>
+                </a:solidFill>
+                <a:latin typeface="SimHei"/>
+              </a:defRPr>
+            </a:pPr>
+            <a:r>
+              <a:t>  但 header 已消费, payload 留在 buffer → 协议错位</a:t>
+            </a:r>
+          </a:p>
+          <a:p>
+            <a:pPr>
+              <a:spcBef>
+                <a:spcPts val="600"/>
+              </a:spcBef>
+              <a:defRPr sz="1500">
+                <a:solidFill>
+                  <a:srgbClr val="333333"/>
+                </a:solidFill>
+                <a:latin typeface="SimHei"/>
+              </a:defRPr>
+            </a:pPr>
+            <a:r>
+              <a:t>  irq_poller 永远读不到有效消息</a:t>
+            </a:r>
+          </a:p>
+          <a:p>
+            <a:pPr>
+              <a:spcBef>
+                <a:spcPts val="600"/>
+              </a:spcBef>
+              <a:defRPr sz="1500">
+                <a:solidFill>
+                  <a:srgbClr val="333333"/>
+                </a:solidFill>
+                <a:latin typeface="SimHei"/>
+              </a:defRPr>
+            </a:pPr>
+          </a:p>
+          <a:p>
+            <a:pPr>
+              <a:spcBef>
+                <a:spcPts val="600"/>
+              </a:spcBef>
+              <a:defRPr sz="1500">
+                <a:solidFill>
+                  <a:srgbClr val="333333"/>
+                </a:solidFill>
+                <a:latin typeface="SimHei"/>
+              </a:defRPr>
+            </a:pPr>
+            <a:r>
+              <a:t>修复: _nb 函数改用 MSG_PEEK 预读 header</a:t>
+            </a:r>
+          </a:p>
+          <a:p>
+            <a:pPr>
+              <a:spcBef>
+                <a:spcPts val="600"/>
+              </a:spcBef>
+              <a:defRPr sz="1500">
+                <a:solidFill>
+                  <a:srgbClr val="333333"/>
+                </a:solidFill>
+                <a:latin typeface="SimHei"/>
+              </a:defRPr>
+            </a:pPr>
+            <a:r>
+              <a:t>  类型不匹配时返回 1（无数据）不消费 buffer</a:t>
+            </a:r>
+          </a:p>
+          <a:p>
+            <a:pPr>
+              <a:spcBef>
+                <a:spcPts val="600"/>
+              </a:spcBef>
+              <a:defRPr sz="1500">
+                <a:solidFill>
+                  <a:srgbClr val="333333"/>
+                </a:solidFill>
+                <a:latin typeface="SimHei"/>
+              </a:defRPr>
+            </a:pPr>
+            <a:r>
+              <a:t>  匹配时正式 recv 消费 header + payload</a:t>
+            </a:r>
+          </a:p>
+        </p:txBody>
+      </p:sp>
     </p:spTree>
   </p:cSld>
   <p:clrMapOvr>
